--- a/research-agent/outputs/run_1728834388_Is AI in a hype cycle_/GenAI_Transformation.pptx
+++ b/research-agent/outputs/run_1728834388_Is AI in a hype cycle_/GenAI_Transformation.pptx
@@ -4,12 +4,12 @@
   <p:sldMasterIdLst>
     <p:sldMasterId id="2147483648" r:id="rId1"/>
   </p:sldMasterIdLst>
+  <p:sldIdLst>
+    <p:sldId id="256" r:id="rId2"/>
+  </p:sldIdLst>
   <p:notesMasterIdLst>
     <p:notesMasterId r:id="rId3"/>
   </p:notesMasterIdLst>
-  <p:sldIdLst>
-    <p:sldId id="256" r:id="rId2"/>
-  </p:sldIdLst>
   <p:sldSz cx="12192000" cy="6858000"/>
   <p:notesSz cx="6858000" cy="12192000"/>
   <p:defaultTextStyle>
@@ -104,11 +104,6 @@
       </a:defRPr>
     </a:lvl9pPr>
   </p:defaultTextStyle>
-  <p:extLst>
-    <p:ext uri="{EFAFB233-063F-42B5-8137-9DF3F51BA10A}">
-      <p15:sldGuideLst xmlns:p15="http://schemas.microsoft.com/office/powerpoint/2012/main"/>
-    </p:ext>
-  </p:extLst>
 </p:presentation>
 </file>
 
@@ -134,10 +129,234 @@
           <a:chExt cx="0" cy="0"/>
         </a:xfrm>
       </p:grpSpPr>
+      <p:sp>
+        <p:nvSpPr>
+          <p:cNvPr id="2" name="Header Placeholder 1"/>
+          <p:cNvSpPr>
+            <a:spLocks noGrp="1"/>
+          </p:cNvSpPr>
+          <p:nvPr>
+            <p:ph type="hdr" sz="quarter"/>
+          </p:nvPr>
+        </p:nvSpPr>
+        <p:spPr>
+          <a:xfrm>
+            <a:off x="0" y="0"/>
+            <a:ext cx="2971800" cy="458788"/>
+          </a:xfrm>
+          <a:prstGeom prst="rect">
+            <a:avLst/>
+          </a:prstGeom>
+        </p:spPr>
+        <p:txBody>
+          <a:bodyPr vert="horz" lIns="91440" tIns="45720" rIns="91440" bIns="45720" rtlCol="0"/>
+          <a:lstStyle>
+            <a:lvl1pPr algn="l">
+              <a:defRPr sz="1200"/>
+            </a:lvl1pPr>
+          </a:lstStyle>
+          <a:p>
+            <a:endParaRPr lang="en-US"/>
+          </a:p>
+        </p:txBody>
+      </p:sp>
+      <p:sp>
+        <p:nvSpPr>
+          <p:cNvPr id="3" name="Date Placeholder 2"/>
+          <p:cNvSpPr>
+            <a:spLocks noGrp="1"/>
+          </p:cNvSpPr>
+          <p:nvPr>
+            <p:ph type="dt" idx="1"/>
+          </p:nvPr>
+        </p:nvSpPr>
+        <p:spPr>
+          <a:xfrm>
+            <a:off x="3884613" y="0"/>
+            <a:ext cx="2971800" cy="458788"/>
+          </a:xfrm>
+          <a:prstGeom prst="rect">
+            <a:avLst/>
+          </a:prstGeom>
+        </p:spPr>
+        <p:txBody>
+          <a:bodyPr vert="horz" lIns="91440" tIns="45720" rIns="91440" bIns="45720" rtlCol="0"/>
+          <a:lstStyle>
+            <a:lvl1pPr algn="r">
+              <a:defRPr sz="1200"/>
+            </a:lvl1pPr>
+          </a:lstStyle>
+          <a:p>
+            <a:fld id="{5282F153-3F37-0F45-9E97-73ACFA13230C}" type="datetimeFigureOut">
+              <a:rPr lang="en-US"/>
+              <a:t>7/23/19</a:t>
+            </a:fld>
+            <a:endParaRPr lang="en-US"/>
+          </a:p>
+        </p:txBody>
+      </p:sp>
+      <p:sp>
+        <p:nvSpPr>
+          <p:cNvPr id="4" name="Slide Image Placeholder 3"/>
+          <p:cNvSpPr>
+            <a:spLocks noGrp="1" noRot="1" noChangeAspect="1"/>
+          </p:cNvSpPr>
+          <p:nvPr>
+            <p:ph type="sldImg" idx="2"/>
+          </p:nvPr>
+        </p:nvSpPr>
+        <p:spPr>
+          <a:xfrm>
+            <a:off x="685800" y="1143000"/>
+            <a:ext cx="5486400" cy="3086100"/>
+          </a:xfrm>
+          <a:prstGeom prst="rect">
+            <a:avLst/>
+          </a:prstGeom>
+          <a:noFill/>
+          <a:ln w="12700">
+            <a:solidFill>
+              <a:prstClr val="black"/>
+            </a:solidFill>
+          </a:ln>
+        </p:spPr>
+        <p:txBody>
+          <a:bodyPr vert="horz" lIns="91440" tIns="45720" rIns="91440" bIns="45720" rtlCol="0" anchor="ctr"/>
+          <a:lstStyle/>
+          <a:p>
+            <a:endParaRPr lang="en-US"/>
+          </a:p>
+        </p:txBody>
+      </p:sp>
+      <p:sp>
+        <p:nvSpPr>
+          <p:cNvPr id="5" name="Notes Placeholder 4"/>
+          <p:cNvSpPr>
+            <a:spLocks noGrp="1"/>
+          </p:cNvSpPr>
+          <p:nvPr>
+            <p:ph type="body" sz="quarter" idx="3"/>
+          </p:nvPr>
+        </p:nvSpPr>
+        <p:spPr>
+          <a:xfrm>
+            <a:off x="685800" y="4400550"/>
+            <a:ext cx="5486400" cy="3600450"/>
+          </a:xfrm>
+          <a:prstGeom prst="rect">
+            <a:avLst/>
+          </a:prstGeom>
+        </p:spPr>
+        <p:txBody>
+          <a:bodyPr vert="horz" lIns="91440" tIns="45720" rIns="91440" bIns="45720" rtlCol="0"/>
+          <a:lstStyle/>
+          <a:p>
+            <a:pPr lvl="0"/>
+            <a:r>
+              <a:rPr lang="en-US"/>
+              <a:t>Click to edit Master text styles</a:t>
+            </a:r>
+          </a:p>
+          <a:p>
+            <a:pPr lvl="1"/>
+            <a:r>
+              <a:rPr lang="en-US"/>
+              <a:t>Second level</a:t>
+            </a:r>
+          </a:p>
+          <a:p>
+            <a:pPr lvl="2"/>
+            <a:r>
+              <a:rPr lang="en-US"/>
+              <a:t>Third level</a:t>
+            </a:r>
+          </a:p>
+          <a:p>
+            <a:pPr lvl="3"/>
+            <a:r>
+              <a:rPr lang="en-US"/>
+              <a:t>Fourth level</a:t>
+            </a:r>
+          </a:p>
+          <a:p>
+            <a:pPr lvl="4"/>
+            <a:r>
+              <a:rPr lang="en-US"/>
+              <a:t>Fifth level</a:t>
+            </a:r>
+          </a:p>
+        </p:txBody>
+      </p:sp>
+      <p:sp>
+        <p:nvSpPr>
+          <p:cNvPr id="6" name="Footer Placeholder 5"/>
+          <p:cNvSpPr>
+            <a:spLocks noGrp="1"/>
+          </p:cNvSpPr>
+          <p:nvPr>
+            <p:ph type="ftr" sz="quarter" idx="4"/>
+          </p:nvPr>
+        </p:nvSpPr>
+        <p:spPr>
+          <a:xfrm>
+            <a:off x="0" y="8685213"/>
+            <a:ext cx="2971800" cy="458787"/>
+          </a:xfrm>
+          <a:prstGeom prst="rect">
+            <a:avLst/>
+          </a:prstGeom>
+        </p:spPr>
+        <p:txBody>
+          <a:bodyPr vert="horz" lIns="91440" tIns="45720" rIns="91440" bIns="45720" rtlCol="0" anchor="b"/>
+          <a:lstStyle>
+            <a:lvl1pPr algn="l">
+              <a:defRPr sz="1200"/>
+            </a:lvl1pPr>
+          </a:lstStyle>
+          <a:p>
+            <a:endParaRPr lang="en-US"/>
+          </a:p>
+        </p:txBody>
+      </p:sp>
+      <p:sp>
+        <p:nvSpPr>
+          <p:cNvPr id="7" name="Slide Number Placeholder 6"/>
+          <p:cNvSpPr>
+            <a:spLocks noGrp="1"/>
+          </p:cNvSpPr>
+          <p:nvPr>
+            <p:ph type="sldNum" sz="quarter" idx="5"/>
+          </p:nvPr>
+        </p:nvSpPr>
+        <p:spPr>
+          <a:xfrm>
+            <a:off x="3884613" y="8685213"/>
+            <a:ext cx="2971800" cy="458787"/>
+          </a:xfrm>
+          <a:prstGeom prst="rect">
+            <a:avLst/>
+          </a:prstGeom>
+        </p:spPr>
+        <p:txBody>
+          <a:bodyPr vert="horz" lIns="91440" tIns="45720" rIns="91440" bIns="45720" rtlCol="0" anchor="b"/>
+          <a:lstStyle>
+            <a:lvl1pPr algn="r">
+              <a:defRPr sz="1200"/>
+            </a:lvl1pPr>
+          </a:lstStyle>
+          <a:p>
+            <a:fld id="{CE5E9CC1-C706-0F49-92D6-E571CC5EEA8F}" type="slidenum">
+              <a:rPr lang="en-US"/>
+              <a:t>‹#›</a:t>
+            </a:fld>
+            <a:endParaRPr lang="en-US"/>
+          </a:p>
+        </p:txBody>
+      </p:sp>
     </p:spTree>
     <p:extLst>
       <p:ext uri="{BB962C8B-B14F-4D97-AF65-F5344CB8AC3E}">
-        <p14:creationId xmlns:p14="http://schemas.microsoft.com/office/powerpoint/2010/main" val="2845814809"/>
+        <p14:creationId xmlns:p14="http://schemas.microsoft.com/office/powerpoint/2010/main" val="1024086991"/>
       </p:ext>
     </p:extLst>
   </p:cSld>
@@ -281,6 +500,10 @@
           <a:bodyPr/>
           <a:lstStyle/>
           <a:p>
+            <a:r>
+              <a:rPr lang="en-US" dirty="0"/>
+              <a:t/>
+            </a:r>
             <a:endParaRPr lang="en-US" dirty="0"/>
           </a:p>
         </p:txBody>
@@ -354,11 +577,6 @@
 <file path=ppt/slideMasters/slideMaster1.xml><?xml version="1.0" encoding="utf-8"?>
 <p:sldMaster xmlns:a="http://schemas.openxmlformats.org/drawingml/2006/main" xmlns:r="http://schemas.openxmlformats.org/officeDocument/2006/relationships" xmlns:p="http://schemas.openxmlformats.org/presentationml/2006/main">
   <p:cSld>
-    <p:bg>
-      <p:bgRef idx="1001">
-        <a:schemeClr val="bg1"/>
-      </p:bgRef>
-    </p:bg>
     <p:spTree>
       <p:nvGrpSpPr>
         <p:cNvPr id="1" name=""/>
@@ -641,7 +859,6 @@
         <a:solidFill>
           <a:srgbClr val="FFFFFF"/>
         </a:solidFill>
-        <a:effectLst/>
       </p:bgPr>
     </p:bg>
     <p:spTree>
@@ -679,13 +896,13 @@
           <a:bodyPr wrap="square" lIns="0" tIns="0" rIns="0" bIns="0" rtlCol="0" anchor="ctr"/>
           <a:lstStyle/>
           <a:p>
-            <a:pPr marL="0" indent="0">
+            <a:pPr indent="0" marL="0">
               <a:buNone/>
             </a:pPr>
             <a:r>
-              <a:rPr lang="en-US" sz="1100" b="1" kern="0" spc="200" dirty="0">
-                <a:solidFill>
-                  <a:srgbClr val="1F6FEB"/>
+              <a:rPr lang="en-US" sz="1100" b="1" spc="200" kern="0" dirty="0">
+                <a:solidFill>
+                  <a:srgbClr val="EA580C"/>
                 </a:solidFill>
                 <a:latin typeface="Arial" pitchFamily="34" charset="0"/>
                 <a:ea typeface="Arial" pitchFamily="34" charset="-122"/>
@@ -693,10 +910,13 @@
               </a:rPr>
               <a:t>GENAI </a:t>
             </a:r>
-            <a:r>
-              <a:rPr lang="en-US" sz="1100" b="1" kern="0" spc="200" dirty="0">
-                <a:solidFill>
-                  <a:srgbClr val="0B1F33"/>
+            <a:pPr indent="0" marL="0">
+              <a:buNone/>
+            </a:pPr>
+            <a:r>
+              <a:rPr lang="en-US" sz="1100" b="1" spc="200" kern="0" dirty="0">
+                <a:solidFill>
+                  <a:srgbClr val="3A1A06"/>
                 </a:solidFill>
                 <a:latin typeface="Arial" pitchFamily="34" charset="0"/>
                 <a:ea typeface="Arial" pitchFamily="34" charset="-122"/>
@@ -704,8 +924,11 @@
               </a:rPr>
               <a:t>TRANSFORMATION</a:t>
             </a:r>
-            <a:r>
-              <a:rPr lang="en-US" sz="1100" kern="0" spc="200" dirty="0">
+            <a:pPr indent="0" marL="0">
+              <a:buNone/>
+            </a:pPr>
+            <a:r>
+              <a:rPr lang="en-US" sz="1100" spc="200" kern="0" dirty="0">
                 <a:solidFill>
                   <a:srgbClr val="B8C0CC"/>
                 </a:solidFill>
@@ -715,10 +938,13 @@
               </a:rPr>
               <a:t>   |   </a:t>
             </a:r>
-            <a:r>
-              <a:rPr lang="en-US" sz="1100" kern="0" spc="200" dirty="0">
-                <a:solidFill>
-                  <a:srgbClr val="0B1F33"/>
+            <a:pPr indent="0" marL="0">
+              <a:buNone/>
+            </a:pPr>
+            <a:r>
+              <a:rPr lang="en-US" sz="1100" spc="200" kern="0" dirty="0">
+                <a:solidFill>
+                  <a:srgbClr val="3A1A06"/>
                 </a:solidFill>
                 <a:latin typeface="Arial" pitchFamily="34" charset="0"/>
                 <a:ea typeface="Arial" pitchFamily="34" charset="-122"/>
@@ -751,13 +977,13 @@
           <a:bodyPr wrap="square" lIns="0" tIns="0" rIns="0" bIns="0" rtlCol="0" anchor="t"/>
           <a:lstStyle/>
           <a:p>
-            <a:pPr marL="0" indent="0">
+            <a:pPr indent="0" marL="0">
               <a:buNone/>
             </a:pPr>
             <a:r>
               <a:rPr lang="en-US" sz="3200" b="1" dirty="0">
                 <a:solidFill>
-                  <a:srgbClr val="0B1F33"/>
+                  <a:srgbClr val="3A1A06"/>
                 </a:solidFill>
                 <a:latin typeface="Arial" pitchFamily="34" charset="0"/>
                 <a:ea typeface="Arial" pitchFamily="34" charset="-122"/>
@@ -768,13 +994,13 @@
             <a:endParaRPr lang="en-US" sz="3200" dirty="0"/>
           </a:p>
           <a:p>
-            <a:pPr marL="0" indent="0">
+            <a:pPr indent="0" marL="0">
               <a:buNone/>
             </a:pPr>
             <a:r>
               <a:rPr lang="en-US" sz="3200" b="1" dirty="0">
                 <a:solidFill>
-                  <a:srgbClr val="0B1F33"/>
+                  <a:srgbClr val="3A1A06"/>
                 </a:solidFill>
                 <a:latin typeface="Arial" pitchFamily="34" charset="0"/>
                 <a:ea typeface="Arial" pitchFamily="34" charset="-122"/>
@@ -801,22 +1027,15 @@
             <a:avLst/>
           </a:prstGeom>
           <a:solidFill>
-            <a:srgbClr val="1F6FEB"/>
+            <a:srgbClr val="EA580C"/>
           </a:solidFill>
           <a:ln w="12700">
             <a:solidFill>
-              <a:srgbClr val="1F6FEB"/>
+              <a:srgbClr val="EA580C"/>
             </a:solidFill>
             <a:prstDash val="solid"/>
           </a:ln>
         </p:spPr>
-        <p:txBody>
-          <a:bodyPr/>
-          <a:lstStyle/>
-          <a:p>
-            <a:endParaRPr lang="en-IN"/>
-          </a:p>
-        </p:txBody>
       </p:sp>
       <p:sp>
         <p:nvSpPr>
@@ -839,13 +1058,13 @@
           <a:bodyPr wrap="square" lIns="0" tIns="0" rIns="0" bIns="0" rtlCol="0" anchor="ctr"/>
           <a:lstStyle/>
           <a:p>
-            <a:pPr marL="0" indent="0">
+            <a:pPr indent="0" marL="0">
               <a:buNone/>
             </a:pPr>
             <a:r>
               <a:rPr lang="en-US" sz="1200" dirty="0">
                 <a:solidFill>
-                  <a:srgbClr val="5A6473"/>
+                  <a:srgbClr val="78564A"/>
                 </a:solidFill>
                 <a:latin typeface="Arial" pitchFamily="34" charset="0"/>
                 <a:ea typeface="Arial" pitchFamily="34" charset="-122"/>
@@ -876,18 +1095,11 @@
           </a:solidFill>
           <a:ln w="12700">
             <a:solidFill>
-              <a:srgbClr val="E3E8EF"/>
+              <a:srgbClr val="F2D9C6"/>
             </a:solidFill>
             <a:prstDash val="solid"/>
           </a:ln>
         </p:spPr>
-        <p:txBody>
-          <a:bodyPr/>
-          <a:lstStyle/>
-          <a:p>
-            <a:endParaRPr lang="en-IN"/>
-          </a:p>
-        </p:txBody>
       </p:sp>
       <p:sp>
         <p:nvSpPr>
@@ -904,22 +1116,15 @@
             <a:avLst/>
           </a:prstGeom>
           <a:solidFill>
-            <a:srgbClr val="1F6FEB"/>
+            <a:srgbClr val="EA580C"/>
           </a:solidFill>
           <a:ln w="12700">
             <a:solidFill>
-              <a:srgbClr val="1F6FEB"/>
+              <a:srgbClr val="EA580C"/>
             </a:solidFill>
             <a:prstDash val="solid"/>
           </a:ln>
         </p:spPr>
-        <p:txBody>
-          <a:bodyPr/>
-          <a:lstStyle/>
-          <a:p>
-            <a:endParaRPr lang="en-IN"/>
-          </a:p>
-        </p:txBody>
       </p:sp>
       <p:sp>
         <p:nvSpPr>
@@ -936,22 +1141,15 @@
             <a:avLst/>
           </a:prstGeom>
           <a:solidFill>
-            <a:srgbClr val="0B1F33"/>
+            <a:srgbClr val="3A1A06"/>
           </a:solidFill>
           <a:ln w="12700">
             <a:solidFill>
-              <a:srgbClr val="0B1F33"/>
+              <a:srgbClr val="3A1A06"/>
             </a:solidFill>
             <a:prstDash val="solid"/>
           </a:ln>
         </p:spPr>
-        <p:txBody>
-          <a:bodyPr/>
-          <a:lstStyle/>
-          <a:p>
-            <a:endParaRPr lang="en-IN"/>
-          </a:p>
-        </p:txBody>
       </p:sp>
       <p:sp>
         <p:nvSpPr>
@@ -968,22 +1166,15 @@
             <a:avLst/>
           </a:prstGeom>
           <a:solidFill>
-            <a:srgbClr val="0B1F33"/>
+            <a:srgbClr val="3A1A06"/>
           </a:solidFill>
           <a:ln w="12700">
             <a:solidFill>
-              <a:srgbClr val="0B1F33"/>
+              <a:srgbClr val="3A1A06"/>
             </a:solidFill>
             <a:prstDash val="solid"/>
           </a:ln>
         </p:spPr>
-        <p:txBody>
-          <a:bodyPr/>
-          <a:lstStyle/>
-          <a:p>
-            <a:endParaRPr lang="en-IN"/>
-          </a:p>
-        </p:txBody>
       </p:sp>
       <p:sp>
         <p:nvSpPr>
@@ -1006,7 +1197,7 @@
           <a:bodyPr wrap="square" lIns="0" tIns="0" rIns="0" bIns="0" rtlCol="0" anchor="ctr"/>
           <a:lstStyle/>
           <a:p>
-            <a:pPr marL="0" indent="0" algn="ctr">
+            <a:pPr algn="ctr" indent="0" marL="0">
               <a:buNone/>
             </a:pPr>
             <a:r>
@@ -1026,7 +1217,288 @@
       </p:sp>
       <p:pic>
         <p:nvPicPr>
-          <p:cNvPr id="11" name="Image 0" descr="preencoded.png"/>
+          <p:cNvPr id="11" name="Image 0" descr="preencoded.png">    </p:cNvPr>
+          <p:cNvPicPr>
+            <a:picLocks noChangeAspect="1"/>
+          </p:cNvPicPr>
+          <p:nvPr/>
+        </p:nvPicPr>
+        <p:blipFill>
+          <a:blip r:embed="rId1"/>
+          <a:stretch>
+            <a:fillRect/>
+          </a:stretch>
+        </p:blipFill>
+        <p:spPr>
+          <a:xfrm>
+            <a:off x="1234440" y="2651760"/>
+            <a:ext cx="384048" cy="384048"/>
+          </a:xfrm>
+          <a:prstGeom prst="rect">
+            <a:avLst/>
+          </a:prstGeom>
+        </p:spPr>
+      </p:pic>
+      <p:sp>
+        <p:nvSpPr>
+          <p:cNvPr id="12" name="Text 9"/>
+          <p:cNvSpPr/>
+          <p:nvPr/>
+        </p:nvSpPr>
+        <p:spPr>
+          <a:xfrm>
+            <a:off x="1737360" y="2587752"/>
+            <a:ext cx="2331720" cy="292608"/>
+          </a:xfrm>
+          <a:prstGeom prst="rect">
+            <a:avLst/>
+          </a:prstGeom>
+          <a:noFill/>
+          <a:ln/>
+        </p:spPr>
+        <p:txBody>
+          <a:bodyPr wrap="square" lIns="0" tIns="0" rIns="0" bIns="0" rtlCol="0" anchor="ctr"/>
+          <a:lstStyle/>
+          <a:p>
+            <a:pPr indent="0" marL="0">
+              <a:buNone/>
+            </a:pPr>
+            <a:r>
+              <a:rPr lang="en-US" sz="1500" b="1" dirty="0">
+                <a:solidFill>
+                  <a:srgbClr val="3A1A06"/>
+                </a:solidFill>
+                <a:latin typeface="Arial" pitchFamily="34" charset="0"/>
+                <a:ea typeface="Arial" pitchFamily="34" charset="-122"/>
+                <a:cs typeface="Arial" pitchFamily="34" charset="-120"/>
+              </a:rPr>
+              <a:t>Use Case Acceleration</a:t>
+            </a:r>
+            <a:endParaRPr lang="en-US" sz="1500" dirty="0"/>
+          </a:p>
+        </p:txBody>
+      </p:sp>
+      <p:sp>
+        <p:nvSpPr>
+          <p:cNvPr id="13" name="Text 10"/>
+          <p:cNvSpPr/>
+          <p:nvPr/>
+        </p:nvSpPr>
+        <p:spPr>
+          <a:xfrm>
+            <a:off x="1737360" y="2862072"/>
+            <a:ext cx="2331720" cy="256032"/>
+          </a:xfrm>
+          <a:prstGeom prst="rect">
+            <a:avLst/>
+          </a:prstGeom>
+          <a:noFill/>
+          <a:ln/>
+        </p:spPr>
+        <p:txBody>
+          <a:bodyPr wrap="square" lIns="0" tIns="0" rIns="0" bIns="0" rtlCol="0" anchor="ctr"/>
+          <a:lstStyle/>
+          <a:p>
+            <a:pPr indent="0" marL="0">
+              <a:buNone/>
+            </a:pPr>
+            <a:r>
+              <a:rPr lang="en-US" sz="1200" b="1" dirty="0">
+                <a:solidFill>
+                  <a:srgbClr val="EA580C"/>
+                </a:solidFill>
+                <a:latin typeface="Arial" pitchFamily="34" charset="0"/>
+                <a:ea typeface="Arial" pitchFamily="34" charset="-122"/>
+                <a:cs typeface="Arial" pitchFamily="34" charset="-120"/>
+              </a:rPr>
+              <a:t>Identify. Build. Scale.</a:t>
+            </a:r>
+            <a:endParaRPr lang="en-US" sz="1200" dirty="0"/>
+          </a:p>
+        </p:txBody>
+      </p:sp>
+      <p:sp>
+        <p:nvSpPr>
+          <p:cNvPr id="14" name="Shape 11"/>
+          <p:cNvSpPr/>
+          <p:nvPr/>
+        </p:nvSpPr>
+        <p:spPr>
+          <a:xfrm>
+            <a:off x="685800" y="3227832"/>
+            <a:ext cx="3246120" cy="0"/>
+          </a:xfrm>
+          <a:prstGeom prst="line">
+            <a:avLst/>
+          </a:prstGeom>
+          <a:noFill/>
+          <a:ln w="12700">
+            <a:solidFill>
+              <a:srgbClr val="F2D9C6"/>
+            </a:solidFill>
+            <a:prstDash val="solid"/>
+          </a:ln>
+        </p:spPr>
+      </p:sp>
+      <p:sp>
+        <p:nvSpPr>
+          <p:cNvPr id="15" name="Shape 12"/>
+          <p:cNvSpPr/>
+          <p:nvPr/>
+        </p:nvSpPr>
+        <p:spPr>
+          <a:xfrm>
+            <a:off x="685800" y="3337560"/>
+            <a:ext cx="502920" cy="502920"/>
+          </a:xfrm>
+          <a:prstGeom prst="rect">
+            <a:avLst/>
+          </a:prstGeom>
+          <a:solidFill>
+            <a:srgbClr val="FFEBDA"/>
+          </a:solidFill>
+          <a:ln w="12700">
+            <a:solidFill>
+              <a:srgbClr val="FFEBDA"/>
+            </a:solidFill>
+            <a:prstDash val="solid"/>
+          </a:ln>
+        </p:spPr>
+      </p:sp>
+      <p:pic>
+        <p:nvPicPr>
+          <p:cNvPr id="16" name="Image 1" descr="preencoded.png">    </p:cNvPr>
+          <p:cNvPicPr>
+            <a:picLocks noChangeAspect="1"/>
+          </p:cNvPicPr>
+          <p:nvPr/>
+        </p:nvPicPr>
+        <p:blipFill>
+          <a:blip r:embed="rId2"/>
+          <a:stretch>
+            <a:fillRect/>
+          </a:stretch>
+        </p:blipFill>
+        <p:spPr>
+          <a:xfrm>
+            <a:off x="768096" y="3419856"/>
+            <a:ext cx="338328" cy="338328"/>
+          </a:xfrm>
+          <a:prstGeom prst="rect">
+            <a:avLst/>
+          </a:prstGeom>
+        </p:spPr>
+      </p:pic>
+      <p:sp>
+        <p:nvSpPr>
+          <p:cNvPr id="17" name="Text 13"/>
+          <p:cNvSpPr/>
+          <p:nvPr/>
+        </p:nvSpPr>
+        <p:spPr>
+          <a:xfrm>
+            <a:off x="1325880" y="3319272"/>
+            <a:ext cx="2743200" cy="256032"/>
+          </a:xfrm>
+          <a:prstGeom prst="rect">
+            <a:avLst/>
+          </a:prstGeom>
+          <a:noFill/>
+          <a:ln/>
+        </p:spPr>
+        <p:txBody>
+          <a:bodyPr wrap="square" lIns="0" tIns="0" rIns="0" bIns="0" rtlCol="0" anchor="ctr"/>
+          <a:lstStyle/>
+          <a:p>
+            <a:pPr indent="0" marL="0">
+              <a:buNone/>
+            </a:pPr>
+            <a:r>
+              <a:rPr lang="en-US" sz="1100" b="1" dirty="0">
+                <a:solidFill>
+                  <a:srgbClr val="EA580C"/>
+                </a:solidFill>
+                <a:latin typeface="Arial" pitchFamily="34" charset="0"/>
+                <a:ea typeface="Arial" pitchFamily="34" charset="-122"/>
+                <a:cs typeface="Arial" pitchFamily="34" charset="-120"/>
+              </a:rPr>
+              <a:t>What we're doing</a:t>
+            </a:r>
+            <a:endParaRPr lang="en-US" sz="1100" dirty="0"/>
+          </a:p>
+        </p:txBody>
+      </p:sp>
+      <p:sp>
+        <p:nvSpPr>
+          <p:cNvPr id="18" name="Text 14"/>
+          <p:cNvSpPr/>
+          <p:nvPr/>
+        </p:nvSpPr>
+        <p:spPr>
+          <a:xfrm>
+            <a:off x="1325880" y="3557016"/>
+            <a:ext cx="2697480" cy="694944"/>
+          </a:xfrm>
+          <a:prstGeom prst="rect">
+            <a:avLst/>
+          </a:prstGeom>
+          <a:noFill/>
+          <a:ln/>
+        </p:spPr>
+        <p:txBody>
+          <a:bodyPr wrap="square" lIns="0" tIns="0" rIns="0" bIns="0" rtlCol="0" anchor="t"/>
+          <a:lstStyle/>
+          <a:p>
+            <a:pPr marL="342900" indent="-342900">
+              <a:spcAft>
+                <a:spcPts val="100"/>
+              </a:spcAft>
+              <a:buSzPct val="100000"/>
+              <a:buChar char="•"/>
+            </a:pPr>
+            <a:r>
+              <a:rPr lang="en-US" sz="950" dirty="0">
+                <a:solidFill>
+                  <a:srgbClr val="3A1A06"/>
+                </a:solidFill>
+                <a:latin typeface="Arial" pitchFamily="34" charset="0"/>
+                <a:ea typeface="Arial" pitchFamily="34" charset="-122"/>
+                <a:cs typeface="Arial" pitchFamily="34" charset="-120"/>
+              </a:rPr>
+              <a:t>Identifying high-value use cases across functions and building GenAI solutions with rapid pilots and scalable design.</a:t>
+            </a:r>
+            <a:endParaRPr lang="en-US" sz="950" dirty="0"/>
+          </a:p>
+        </p:txBody>
+      </p:sp>
+      <p:sp>
+        <p:nvSpPr>
+          <p:cNvPr id="19" name="Shape 15"/>
+          <p:cNvSpPr/>
+          <p:nvPr/>
+        </p:nvSpPr>
+        <p:spPr>
+          <a:xfrm>
+            <a:off x="685800" y="4251960"/>
+            <a:ext cx="502920" cy="502920"/>
+          </a:xfrm>
+          <a:prstGeom prst="rect">
+            <a:avLst/>
+          </a:prstGeom>
+          <a:solidFill>
+            <a:srgbClr val="FFEBDA"/>
+          </a:solidFill>
+          <a:ln w="12700">
+            <a:solidFill>
+              <a:srgbClr val="FFEBDA"/>
+            </a:solidFill>
+            <a:prstDash val="solid"/>
+          </a:ln>
+        </p:spPr>
+      </p:sp>
+      <p:pic>
+        <p:nvPicPr>
+          <p:cNvPr id="20" name="Image 2" descr="preencoded.png">    </p:cNvPr>
           <p:cNvPicPr>
             <a:picLocks noChangeAspect="1"/>
           </p:cNvPicPr>
@@ -1040,8 +1512,8 @@
         </p:blipFill>
         <p:spPr>
           <a:xfrm>
-            <a:off x="1234440" y="2651760"/>
-            <a:ext cx="384048" cy="384048"/>
+            <a:off x="768096" y="4334256"/>
+            <a:ext cx="338328" cy="338328"/>
           </a:xfrm>
           <a:prstGeom prst="rect">
             <a:avLst/>
@@ -1050,14 +1522,14 @@
       </p:pic>
       <p:sp>
         <p:nvSpPr>
-          <p:cNvPr id="12" name="Text 9"/>
-          <p:cNvSpPr/>
-          <p:nvPr/>
-        </p:nvSpPr>
-        <p:spPr>
-          <a:xfrm>
-            <a:off x="1737360" y="2587752"/>
-            <a:ext cx="2331720" cy="292608"/>
+          <p:cNvPr id="21" name="Text 16"/>
+          <p:cNvSpPr/>
+          <p:nvPr/>
+        </p:nvSpPr>
+        <p:spPr>
+          <a:xfrm>
+            <a:off x="1325880" y="4233672"/>
+            <a:ext cx="2743200" cy="256032"/>
           </a:xfrm>
           <a:prstGeom prst="rect">
             <a:avLst/>
@@ -1069,34 +1541,34 @@
           <a:bodyPr wrap="square" lIns="0" tIns="0" rIns="0" bIns="0" rtlCol="0" anchor="ctr"/>
           <a:lstStyle/>
           <a:p>
-            <a:pPr marL="0" indent="0">
+            <a:pPr indent="0" marL="0">
               <a:buNone/>
             </a:pPr>
             <a:r>
-              <a:rPr lang="en-US" sz="1500" b="1" dirty="0">
-                <a:solidFill>
-                  <a:srgbClr val="0B1F33"/>
-                </a:solidFill>
-                <a:latin typeface="Arial" pitchFamily="34" charset="0"/>
-                <a:ea typeface="Arial" pitchFamily="34" charset="-122"/>
-                <a:cs typeface="Arial" pitchFamily="34" charset="-120"/>
-              </a:rPr>
-              <a:t>Use Case Acceleration</a:t>
-            </a:r>
-            <a:endParaRPr lang="en-US" sz="1500" dirty="0"/>
-          </a:p>
-        </p:txBody>
-      </p:sp>
-      <p:sp>
-        <p:nvSpPr>
-          <p:cNvPr id="13" name="Text 10"/>
-          <p:cNvSpPr/>
-          <p:nvPr/>
-        </p:nvSpPr>
-        <p:spPr>
-          <a:xfrm>
-            <a:off x="1737360" y="2862072"/>
-            <a:ext cx="2331720" cy="256032"/>
+              <a:rPr lang="en-US" sz="1100" b="1" dirty="0">
+                <a:solidFill>
+                  <a:srgbClr val="EA580C"/>
+                </a:solidFill>
+                <a:latin typeface="Arial" pitchFamily="34" charset="0"/>
+                <a:ea typeface="Arial" pitchFamily="34" charset="-122"/>
+                <a:cs typeface="Arial" pitchFamily="34" charset="-120"/>
+              </a:rPr>
+              <a:t>Focus areas (dummy data)</a:t>
+            </a:r>
+            <a:endParaRPr lang="en-US" sz="1100" dirty="0"/>
+          </a:p>
+        </p:txBody>
+      </p:sp>
+      <p:sp>
+        <p:nvSpPr>
+          <p:cNvPr id="22" name="Text 17"/>
+          <p:cNvSpPr/>
+          <p:nvPr/>
+        </p:nvSpPr>
+        <p:spPr>
+          <a:xfrm>
+            <a:off x="1325880" y="4471416"/>
+            <a:ext cx="2697480" cy="694944"/>
           </a:xfrm>
           <a:prstGeom prst="rect">
             <a:avLst/>
@@ -1105,92 +1577,101 @@
           <a:ln/>
         </p:spPr>
         <p:txBody>
-          <a:bodyPr wrap="square" lIns="0" tIns="0" rIns="0" bIns="0" rtlCol="0" anchor="ctr"/>
+          <a:bodyPr wrap="square" lIns="0" tIns="0" rIns="0" bIns="0" rtlCol="0" anchor="t"/>
           <a:lstStyle/>
           <a:p>
-            <a:pPr marL="0" indent="0">
-              <a:buNone/>
-            </a:pPr>
-            <a:r>
-              <a:rPr lang="en-US" sz="1200" b="1" dirty="0">
-                <a:solidFill>
-                  <a:srgbClr val="1F6FEB"/>
-                </a:solidFill>
-                <a:latin typeface="Arial" pitchFamily="34" charset="0"/>
-                <a:ea typeface="Arial" pitchFamily="34" charset="-122"/>
-                <a:cs typeface="Arial" pitchFamily="34" charset="-120"/>
-              </a:rPr>
-              <a:t>Identify. Build. Scale.</a:t>
-            </a:r>
-            <a:endParaRPr lang="en-US" sz="1200" dirty="0"/>
-          </a:p>
-        </p:txBody>
-      </p:sp>
-      <p:sp>
-        <p:nvSpPr>
-          <p:cNvPr id="14" name="Shape 11"/>
-          <p:cNvSpPr/>
-          <p:nvPr/>
-        </p:nvSpPr>
-        <p:spPr>
-          <a:xfrm>
-            <a:off x="685800" y="3227832"/>
-            <a:ext cx="3246120" cy="0"/>
-          </a:xfrm>
-          <a:prstGeom prst="line">
-            <a:avLst/>
-          </a:prstGeom>
-          <a:noFill/>
+            <a:pPr marL="342900" indent="-342900">
+              <a:spcAft>
+                <a:spcPts val="100"/>
+              </a:spcAft>
+              <a:buSzPct val="100000"/>
+              <a:buChar char="•"/>
+            </a:pPr>
+            <a:r>
+              <a:rPr lang="en-US" sz="950" dirty="0">
+                <a:solidFill>
+                  <a:srgbClr val="3A1A06"/>
+                </a:solidFill>
+                <a:latin typeface="Arial" pitchFamily="34" charset="0"/>
+                <a:ea typeface="Arial" pitchFamily="34" charset="-122"/>
+                <a:cs typeface="Arial" pitchFamily="34" charset="-120"/>
+              </a:rPr>
+              <a:t>25+ use cases assessed</a:t>
+            </a:r>
+            <a:endParaRPr lang="en-US" sz="950" dirty="0"/>
+          </a:p>
+          <a:p>
+            <a:pPr marL="342900" indent="-342900">
+              <a:spcAft>
+                <a:spcPts val="100"/>
+              </a:spcAft>
+              <a:buSzPct val="100000"/>
+              <a:buChar char="•"/>
+            </a:pPr>
+            <a:r>
+              <a:rPr lang="en-US" sz="950" dirty="0">
+                <a:solidFill>
+                  <a:srgbClr val="3A1A06"/>
+                </a:solidFill>
+                <a:latin typeface="Arial" pitchFamily="34" charset="0"/>
+                <a:ea typeface="Arial" pitchFamily="34" charset="-122"/>
+                <a:cs typeface="Arial" pitchFamily="34" charset="-120"/>
+              </a:rPr>
+              <a:t>8 pilots in progress</a:t>
+            </a:r>
+            <a:endParaRPr lang="en-US" sz="950" dirty="0"/>
+          </a:p>
+          <a:p>
+            <a:pPr marL="342900" indent="-342900">
+              <a:spcAft>
+                <a:spcPts val="100"/>
+              </a:spcAft>
+              <a:buSzPct val="100000"/>
+              <a:buChar char="•"/>
+            </a:pPr>
+            <a:r>
+              <a:rPr lang="en-US" sz="950" dirty="0">
+                <a:solidFill>
+                  <a:srgbClr val="3A1A06"/>
+                </a:solidFill>
+                <a:latin typeface="Arial" pitchFamily="34" charset="0"/>
+                <a:ea typeface="Arial" pitchFamily="34" charset="-122"/>
+                <a:cs typeface="Arial" pitchFamily="34" charset="-120"/>
+              </a:rPr>
+              <a:t>3 in production</a:t>
+            </a:r>
+            <a:endParaRPr lang="en-US" sz="950" dirty="0"/>
+          </a:p>
+        </p:txBody>
+      </p:sp>
+      <p:sp>
+        <p:nvSpPr>
+          <p:cNvPr id="23" name="Shape 18"/>
+          <p:cNvSpPr/>
+          <p:nvPr/>
+        </p:nvSpPr>
+        <p:spPr>
+          <a:xfrm>
+            <a:off x="685800" y="5166360"/>
+            <a:ext cx="502920" cy="502920"/>
+          </a:xfrm>
+          <a:prstGeom prst="rect">
+            <a:avLst/>
+          </a:prstGeom>
+          <a:solidFill>
+            <a:srgbClr val="FFEBDA"/>
+          </a:solidFill>
           <a:ln w="12700">
             <a:solidFill>
-              <a:srgbClr val="E3E8EF"/>
+              <a:srgbClr val="FFEBDA"/>
             </a:solidFill>
             <a:prstDash val="solid"/>
           </a:ln>
         </p:spPr>
-        <p:txBody>
-          <a:bodyPr/>
-          <a:lstStyle/>
-          <a:p>
-            <a:endParaRPr lang="en-IN"/>
-          </a:p>
-        </p:txBody>
-      </p:sp>
-      <p:sp>
-        <p:nvSpPr>
-          <p:cNvPr id="15" name="Shape 12"/>
-          <p:cNvSpPr/>
-          <p:nvPr/>
-        </p:nvSpPr>
-        <p:spPr>
-          <a:xfrm>
-            <a:off x="685800" y="3337560"/>
-            <a:ext cx="502920" cy="502920"/>
-          </a:xfrm>
-          <a:prstGeom prst="rect">
-            <a:avLst/>
-          </a:prstGeom>
-          <a:solidFill>
-            <a:srgbClr val="EEF3FB"/>
-          </a:solidFill>
-          <a:ln w="12700">
-            <a:solidFill>
-              <a:srgbClr val="EEF3FB"/>
-            </a:solidFill>
-            <a:prstDash val="solid"/>
-          </a:ln>
-        </p:spPr>
-        <p:txBody>
-          <a:bodyPr/>
-          <a:lstStyle/>
-          <a:p>
-            <a:endParaRPr lang="en-IN"/>
-          </a:p>
-        </p:txBody>
       </p:sp>
       <p:pic>
         <p:nvPicPr>
-          <p:cNvPr id="16" name="Image 1" descr="preencoded.png"/>
+          <p:cNvPr id="24" name="Image 3" descr="preencoded.png">    </p:cNvPr>
           <p:cNvPicPr>
             <a:picLocks noChangeAspect="1"/>
           </p:cNvPicPr>
@@ -1204,7 +1685,7 @@
         </p:blipFill>
         <p:spPr>
           <a:xfrm>
-            <a:off x="768096" y="3419856"/>
+            <a:off x="768096" y="5248656"/>
             <a:ext cx="338328" cy="338328"/>
           </a:xfrm>
           <a:prstGeom prst="rect">
@@ -1214,13 +1695,13 @@
       </p:pic>
       <p:sp>
         <p:nvSpPr>
-          <p:cNvPr id="17" name="Text 13"/>
-          <p:cNvSpPr/>
-          <p:nvPr/>
-        </p:nvSpPr>
-        <p:spPr>
-          <a:xfrm>
-            <a:off x="1325880" y="3319272"/>
+          <p:cNvPr id="25" name="Text 19"/>
+          <p:cNvSpPr/>
+          <p:nvPr/>
+        </p:nvSpPr>
+        <p:spPr>
+          <a:xfrm>
+            <a:off x="1325880" y="5148072"/>
             <a:ext cx="2743200" cy="256032"/>
           </a:xfrm>
           <a:prstGeom prst="rect">
@@ -1233,19 +1714,19 @@
           <a:bodyPr wrap="square" lIns="0" tIns="0" rIns="0" bIns="0" rtlCol="0" anchor="ctr"/>
           <a:lstStyle/>
           <a:p>
-            <a:pPr marL="0" indent="0">
+            <a:pPr indent="0" marL="0">
               <a:buNone/>
             </a:pPr>
             <a:r>
               <a:rPr lang="en-US" sz="1100" b="1" dirty="0">
                 <a:solidFill>
-                  <a:srgbClr val="1F6FEB"/>
-                </a:solidFill>
-                <a:latin typeface="Arial" pitchFamily="34" charset="0"/>
-                <a:ea typeface="Arial" pitchFamily="34" charset="-122"/>
-                <a:cs typeface="Arial" pitchFamily="34" charset="-120"/>
-              </a:rPr>
-              <a:t>What we're doing</a:t>
+                  <a:srgbClr val="EA580C"/>
+                </a:solidFill>
+                <a:latin typeface="Arial" pitchFamily="34" charset="0"/>
+                <a:ea typeface="Arial" pitchFamily="34" charset="-122"/>
+                <a:cs typeface="Arial" pitchFamily="34" charset="-120"/>
+              </a:rPr>
+              <a:t>Expected impact</a:t>
             </a:r>
             <a:endParaRPr lang="en-US" sz="1100" dirty="0"/>
           </a:p>
@@ -1253,13 +1734,13 @@
       </p:sp>
       <p:sp>
         <p:nvSpPr>
-          <p:cNvPr id="18" name="Text 14"/>
-          <p:cNvSpPr/>
-          <p:nvPr/>
-        </p:nvSpPr>
-        <p:spPr>
-          <a:xfrm>
-            <a:off x="1325880" y="3557016"/>
+          <p:cNvPr id="26" name="Text 20"/>
+          <p:cNvSpPr/>
+          <p:nvPr/>
+        </p:nvSpPr>
+        <p:spPr>
+          <a:xfrm>
+            <a:off x="1325880" y="5385816"/>
             <a:ext cx="2697480" cy="694944"/>
           </a:xfrm>
           <a:prstGeom prst="rect">
@@ -1282,53 +1763,202 @@
             <a:r>
               <a:rPr lang="en-US" sz="950" dirty="0">
                 <a:solidFill>
-                  <a:srgbClr val="0B1F33"/>
-                </a:solidFill>
-                <a:latin typeface="Arial" pitchFamily="34" charset="0"/>
-                <a:ea typeface="Arial" pitchFamily="34" charset="-122"/>
-                <a:cs typeface="Arial" pitchFamily="34" charset="-120"/>
-              </a:rPr>
-              <a:t>Identifying high-value use cases across functions and building GenAI solutions with rapid pilots and scalable design.</a:t>
+                  <a:srgbClr val="3A1A06"/>
+                </a:solidFill>
+                <a:latin typeface="Arial" pitchFamily="34" charset="0"/>
+                <a:ea typeface="Arial" pitchFamily="34" charset="-122"/>
+                <a:cs typeface="Arial" pitchFamily="34" charset="-120"/>
+              </a:rPr>
+              <a:t>$12M+ annual value potential</a:t>
             </a:r>
             <a:endParaRPr lang="en-US" sz="950" dirty="0"/>
           </a:p>
-        </p:txBody>
-      </p:sp>
-      <p:sp>
-        <p:nvSpPr>
-          <p:cNvPr id="19" name="Shape 15"/>
-          <p:cNvSpPr/>
-          <p:nvPr/>
-        </p:nvSpPr>
-        <p:spPr>
-          <a:xfrm>
-            <a:off x="685800" y="4251960"/>
-            <a:ext cx="502920" cy="502920"/>
-          </a:xfrm>
-          <a:prstGeom prst="rect">
-            <a:avLst/>
-          </a:prstGeom>
-          <a:solidFill>
-            <a:srgbClr val="EEF3FB"/>
+          <a:p>
+            <a:pPr marL="342900" indent="-342900">
+              <a:spcAft>
+                <a:spcPts val="100"/>
+              </a:spcAft>
+              <a:buSzPct val="100000"/>
+              <a:buChar char="•"/>
+            </a:pPr>
+            <a:r>
+              <a:rPr lang="en-US" sz="950" dirty="0">
+                <a:solidFill>
+                  <a:srgbClr val="3A1A06"/>
+                </a:solidFill>
+                <a:latin typeface="Arial" pitchFamily="34" charset="0"/>
+                <a:ea typeface="Arial" pitchFamily="34" charset="-122"/>
+                <a:cs typeface="Arial" pitchFamily="34" charset="-120"/>
+              </a:rPr>
+              <a:t>20–30% productivity improvement</a:t>
+            </a:r>
+            <a:endParaRPr lang="en-US" sz="950" dirty="0"/>
+          </a:p>
+          <a:p>
+            <a:pPr marL="342900" indent="-342900">
+              <a:spcAft>
+                <a:spcPts val="100"/>
+              </a:spcAft>
+              <a:buSzPct val="100000"/>
+              <a:buChar char="•"/>
+            </a:pPr>
+            <a:r>
+              <a:rPr lang="en-US" sz="950" dirty="0">
+                <a:solidFill>
+                  <a:srgbClr val="3A1A06"/>
+                </a:solidFill>
+                <a:latin typeface="Arial" pitchFamily="34" charset="0"/>
+                <a:ea typeface="Arial" pitchFamily="34" charset="-122"/>
+                <a:cs typeface="Arial" pitchFamily="34" charset="-120"/>
+              </a:rPr>
+              <a:t>Enhanced customer and employee experience</a:t>
+            </a:r>
+            <a:endParaRPr lang="en-US" sz="950" dirty="0"/>
+          </a:p>
+        </p:txBody>
+      </p:sp>
+      <p:sp>
+        <p:nvSpPr>
+          <p:cNvPr id="27" name="Shape 21"/>
+          <p:cNvSpPr/>
+          <p:nvPr/>
+        </p:nvSpPr>
+        <p:spPr>
+          <a:xfrm>
+            <a:off x="4297680" y="2423160"/>
+            <a:ext cx="3703320" cy="3657600"/>
+          </a:xfrm>
+          <a:prstGeom prst="rect">
+            <a:avLst/>
+          </a:prstGeom>
+          <a:solidFill>
+            <a:srgbClr val="FFFFFF"/>
           </a:solidFill>
           <a:ln w="12700">
             <a:solidFill>
-              <a:srgbClr val="EEF3FB"/>
+              <a:srgbClr val="F2D9C6"/>
             </a:solidFill>
             <a:prstDash val="solid"/>
           </a:ln>
         </p:spPr>
-        <p:txBody>
-          <a:bodyPr/>
+      </p:sp>
+      <p:sp>
+        <p:nvSpPr>
+          <p:cNvPr id="28" name="Shape 22"/>
+          <p:cNvSpPr/>
+          <p:nvPr/>
+        </p:nvSpPr>
+        <p:spPr>
+          <a:xfrm>
+            <a:off x="4297680" y="6025896"/>
+            <a:ext cx="3703320" cy="54864"/>
+          </a:xfrm>
+          <a:prstGeom prst="rect">
+            <a:avLst/>
+          </a:prstGeom>
+          <a:solidFill>
+            <a:srgbClr val="EA580C"/>
+          </a:solidFill>
+          <a:ln w="12700">
+            <a:solidFill>
+              <a:srgbClr val="EA580C"/>
+            </a:solidFill>
+            <a:prstDash val="solid"/>
+          </a:ln>
+        </p:spPr>
+      </p:sp>
+      <p:sp>
+        <p:nvSpPr>
+          <p:cNvPr id="29" name="Shape 23"/>
+          <p:cNvSpPr/>
+          <p:nvPr/>
+        </p:nvSpPr>
+        <p:spPr>
+          <a:xfrm>
+            <a:off x="5482742" y="6025896"/>
+            <a:ext cx="1333195" cy="54864"/>
+          </a:xfrm>
+          <a:prstGeom prst="rect">
+            <a:avLst/>
+          </a:prstGeom>
+          <a:solidFill>
+            <a:srgbClr val="3A1A06"/>
+          </a:solidFill>
+          <a:ln w="12700">
+            <a:solidFill>
+              <a:srgbClr val="3A1A06"/>
+            </a:solidFill>
+            <a:prstDash val="solid"/>
+          </a:ln>
+        </p:spPr>
+      </p:sp>
+      <p:sp>
+        <p:nvSpPr>
+          <p:cNvPr id="30" name="Shape 24"/>
+          <p:cNvSpPr/>
+          <p:nvPr/>
+        </p:nvSpPr>
+        <p:spPr>
+          <a:xfrm>
+            <a:off x="4526280" y="2624328"/>
+            <a:ext cx="411480" cy="411480"/>
+          </a:xfrm>
+          <a:prstGeom prst="ellipse">
+            <a:avLst/>
+          </a:prstGeom>
+          <a:solidFill>
+            <a:srgbClr val="3A1A06"/>
+          </a:solidFill>
+          <a:ln w="12700">
+            <a:solidFill>
+              <a:srgbClr val="3A1A06"/>
+            </a:solidFill>
+            <a:prstDash val="solid"/>
+          </a:ln>
+        </p:spPr>
+      </p:sp>
+      <p:sp>
+        <p:nvSpPr>
+          <p:cNvPr id="31" name="Text 25"/>
+          <p:cNvSpPr/>
+          <p:nvPr/>
+        </p:nvSpPr>
+        <p:spPr>
+          <a:xfrm>
+            <a:off x="4526280" y="2624328"/>
+            <a:ext cx="411480" cy="411480"/>
+          </a:xfrm>
+          <a:prstGeom prst="rect">
+            <a:avLst/>
+          </a:prstGeom>
+          <a:noFill/>
+          <a:ln/>
+        </p:spPr>
+        <p:txBody>
+          <a:bodyPr wrap="square" lIns="0" tIns="0" rIns="0" bIns="0" rtlCol="0" anchor="ctr"/>
           <a:lstStyle/>
           <a:p>
-            <a:endParaRPr lang="en-IN"/>
+            <a:pPr algn="ctr" indent="0" marL="0">
+              <a:buNone/>
+            </a:pPr>
+            <a:r>
+              <a:rPr lang="en-US" sz="1400" b="1" dirty="0">
+                <a:solidFill>
+                  <a:srgbClr val="FFFFFF"/>
+                </a:solidFill>
+                <a:latin typeface="Arial" pitchFamily="34" charset="0"/>
+                <a:ea typeface="Arial" pitchFamily="34" charset="-122"/>
+                <a:cs typeface="Arial" pitchFamily="34" charset="-120"/>
+              </a:rPr>
+              <a:t>2</a:t>
+            </a:r>
+            <a:endParaRPr lang="en-US" sz="1400" dirty="0"/>
           </a:p>
         </p:txBody>
       </p:sp>
       <p:pic>
         <p:nvPicPr>
-          <p:cNvPr id="20" name="Image 2" descr="preencoded.png"/>
+          <p:cNvPr id="32" name="Image 4" descr="preencoded.png">    </p:cNvPr>
           <p:cNvPicPr>
             <a:picLocks noChangeAspect="1"/>
           </p:cNvPicPr>
@@ -1342,8 +1972,8 @@
         </p:blipFill>
         <p:spPr>
           <a:xfrm>
-            <a:off x="768096" y="4334256"/>
-            <a:ext cx="338328" cy="338328"/>
+            <a:off x="5074920" y="2651760"/>
+            <a:ext cx="384048" cy="384048"/>
           </a:xfrm>
           <a:prstGeom prst="rect">
             <a:avLst/>
@@ -1352,14 +1982,14 @@
       </p:pic>
       <p:sp>
         <p:nvSpPr>
-          <p:cNvPr id="21" name="Text 16"/>
-          <p:cNvSpPr/>
-          <p:nvPr/>
-        </p:nvSpPr>
-        <p:spPr>
-          <a:xfrm>
-            <a:off x="1325880" y="4233672"/>
-            <a:ext cx="2743200" cy="256032"/>
+          <p:cNvPr id="33" name="Text 26"/>
+          <p:cNvSpPr/>
+          <p:nvPr/>
+        </p:nvSpPr>
+        <p:spPr>
+          <a:xfrm>
+            <a:off x="5577840" y="2587752"/>
+            <a:ext cx="2331720" cy="292608"/>
           </a:xfrm>
           <a:prstGeom prst="rect">
             <a:avLst/>
@@ -1371,34 +2001,34 @@
           <a:bodyPr wrap="square" lIns="0" tIns="0" rIns="0" bIns="0" rtlCol="0" anchor="ctr"/>
           <a:lstStyle/>
           <a:p>
-            <a:pPr marL="0" indent="0">
+            <a:pPr indent="0" marL="0">
               <a:buNone/>
             </a:pPr>
             <a:r>
-              <a:rPr lang="en-US" sz="1100" b="1" dirty="0">
-                <a:solidFill>
-                  <a:srgbClr val="1F6FEB"/>
-                </a:solidFill>
-                <a:latin typeface="Arial" pitchFamily="34" charset="0"/>
-                <a:ea typeface="Arial" pitchFamily="34" charset="-122"/>
-                <a:cs typeface="Arial" pitchFamily="34" charset="-120"/>
-              </a:rPr>
-              <a:t>Focus areas (dummy data)</a:t>
-            </a:r>
-            <a:endParaRPr lang="en-US" sz="1100" dirty="0"/>
-          </a:p>
-        </p:txBody>
-      </p:sp>
-      <p:sp>
-        <p:nvSpPr>
-          <p:cNvPr id="22" name="Text 17"/>
-          <p:cNvSpPr/>
-          <p:nvPr/>
-        </p:nvSpPr>
-        <p:spPr>
-          <a:xfrm>
-            <a:off x="1325880" y="4471416"/>
-            <a:ext cx="2697480" cy="694944"/>
+              <a:rPr lang="en-US" sz="1500" b="1" dirty="0">
+                <a:solidFill>
+                  <a:srgbClr val="3A1A06"/>
+                </a:solidFill>
+                <a:latin typeface="Arial" pitchFamily="34" charset="0"/>
+                <a:ea typeface="Arial" pitchFamily="34" charset="-122"/>
+                <a:cs typeface="Arial" pitchFamily="34" charset="-120"/>
+              </a:rPr>
+              <a:t>Platform &amp; Governance</a:t>
+            </a:r>
+            <a:endParaRPr lang="en-US" sz="1500" dirty="0"/>
+          </a:p>
+        </p:txBody>
+      </p:sp>
+      <p:sp>
+        <p:nvSpPr>
+          <p:cNvPr id="34" name="Text 27"/>
+          <p:cNvSpPr/>
+          <p:nvPr/>
+        </p:nvSpPr>
+        <p:spPr>
+          <a:xfrm>
+            <a:off x="5577840" y="2862072"/>
+            <a:ext cx="2331720" cy="256032"/>
           </a:xfrm>
           <a:prstGeom prst="rect">
             <a:avLst/>
@@ -1407,108 +2037,78 @@
           <a:ln/>
         </p:spPr>
         <p:txBody>
-          <a:bodyPr wrap="square" lIns="0" tIns="0" rIns="0" bIns="0" rtlCol="0" anchor="t"/>
+          <a:bodyPr wrap="square" lIns="0" tIns="0" rIns="0" bIns="0" rtlCol="0" anchor="ctr"/>
           <a:lstStyle/>
           <a:p>
-            <a:pPr marL="342900" indent="-342900">
-              <a:spcAft>
-                <a:spcPts val="100"/>
-              </a:spcAft>
-              <a:buSzPct val="100000"/>
-              <a:buChar char="•"/>
-            </a:pPr>
-            <a:r>
-              <a:rPr lang="en-US" sz="950" dirty="0">
-                <a:solidFill>
-                  <a:srgbClr val="0B1F33"/>
-                </a:solidFill>
-                <a:latin typeface="Arial" pitchFamily="34" charset="0"/>
-                <a:ea typeface="Arial" pitchFamily="34" charset="-122"/>
-                <a:cs typeface="Arial" pitchFamily="34" charset="-120"/>
-              </a:rPr>
-              <a:t>25+ use cases assessed</a:t>
-            </a:r>
-            <a:endParaRPr lang="en-US" sz="950" dirty="0"/>
-          </a:p>
-          <a:p>
-            <a:pPr marL="342900" indent="-342900">
-              <a:spcAft>
-                <a:spcPts val="100"/>
-              </a:spcAft>
-              <a:buSzPct val="100000"/>
-              <a:buChar char="•"/>
-            </a:pPr>
-            <a:r>
-              <a:rPr lang="en-US" sz="950" dirty="0">
-                <a:solidFill>
-                  <a:srgbClr val="0B1F33"/>
-                </a:solidFill>
-                <a:latin typeface="Arial" pitchFamily="34" charset="0"/>
-                <a:ea typeface="Arial" pitchFamily="34" charset="-122"/>
-                <a:cs typeface="Arial" pitchFamily="34" charset="-120"/>
-              </a:rPr>
-              <a:t>8 pilots in progress</a:t>
-            </a:r>
-            <a:endParaRPr lang="en-US" sz="950" dirty="0"/>
-          </a:p>
-          <a:p>
-            <a:pPr marL="342900" indent="-342900">
-              <a:spcAft>
-                <a:spcPts val="100"/>
-              </a:spcAft>
-              <a:buSzPct val="100000"/>
-              <a:buChar char="•"/>
-            </a:pPr>
-            <a:r>
-              <a:rPr lang="en-US" sz="950" dirty="0">
-                <a:solidFill>
-                  <a:srgbClr val="0B1F33"/>
-                </a:solidFill>
-                <a:latin typeface="Arial" pitchFamily="34" charset="0"/>
-                <a:ea typeface="Arial" pitchFamily="34" charset="-122"/>
-                <a:cs typeface="Arial" pitchFamily="34" charset="-120"/>
-              </a:rPr>
-              <a:t>3 in production</a:t>
-            </a:r>
-            <a:endParaRPr lang="en-US" sz="950" dirty="0"/>
-          </a:p>
-        </p:txBody>
-      </p:sp>
-      <p:sp>
-        <p:nvSpPr>
-          <p:cNvPr id="23" name="Shape 18"/>
-          <p:cNvSpPr/>
-          <p:nvPr/>
-        </p:nvSpPr>
-        <p:spPr>
-          <a:xfrm>
-            <a:off x="685800" y="5166360"/>
-            <a:ext cx="502920" cy="502920"/>
-          </a:xfrm>
-          <a:prstGeom prst="rect">
-            <a:avLst/>
-          </a:prstGeom>
-          <a:solidFill>
-            <a:srgbClr val="EEF3FB"/>
-          </a:solidFill>
+            <a:pPr indent="0" marL="0">
+              <a:buNone/>
+            </a:pPr>
+            <a:r>
+              <a:rPr lang="en-US" sz="1200" b="1" dirty="0">
+                <a:solidFill>
+                  <a:srgbClr val="EA580C"/>
+                </a:solidFill>
+                <a:latin typeface="Arial" pitchFamily="34" charset="0"/>
+                <a:ea typeface="Arial" pitchFamily="34" charset="-122"/>
+                <a:cs typeface="Arial" pitchFamily="34" charset="-120"/>
+              </a:rPr>
+              <a:t>Secure. Compliant. Scalable.</a:t>
+            </a:r>
+            <a:endParaRPr lang="en-US" sz="1200" dirty="0"/>
+          </a:p>
+        </p:txBody>
+      </p:sp>
+      <p:sp>
+        <p:nvSpPr>
+          <p:cNvPr id="35" name="Shape 28"/>
+          <p:cNvSpPr/>
+          <p:nvPr/>
+        </p:nvSpPr>
+        <p:spPr>
+          <a:xfrm>
+            <a:off x="4526280" y="3227832"/>
+            <a:ext cx="3246120" cy="0"/>
+          </a:xfrm>
+          <a:prstGeom prst="line">
+            <a:avLst/>
+          </a:prstGeom>
+          <a:noFill/>
           <a:ln w="12700">
             <a:solidFill>
-              <a:srgbClr val="EEF3FB"/>
+              <a:srgbClr val="F2D9C6"/>
             </a:solidFill>
             <a:prstDash val="solid"/>
           </a:ln>
         </p:spPr>
-        <p:txBody>
-          <a:bodyPr/>
-          <a:lstStyle/>
-          <a:p>
-            <a:endParaRPr lang="en-IN"/>
-          </a:p>
-        </p:txBody>
+      </p:sp>
+      <p:sp>
+        <p:nvSpPr>
+          <p:cNvPr id="36" name="Shape 29"/>
+          <p:cNvSpPr/>
+          <p:nvPr/>
+        </p:nvSpPr>
+        <p:spPr>
+          <a:xfrm>
+            <a:off x="4526280" y="3337560"/>
+            <a:ext cx="502920" cy="502920"/>
+          </a:xfrm>
+          <a:prstGeom prst="rect">
+            <a:avLst/>
+          </a:prstGeom>
+          <a:solidFill>
+            <a:srgbClr val="FFEBDA"/>
+          </a:solidFill>
+          <a:ln w="12700">
+            <a:solidFill>
+              <a:srgbClr val="FFEBDA"/>
+            </a:solidFill>
+            <a:prstDash val="solid"/>
+          </a:ln>
+        </p:spPr>
       </p:sp>
       <p:pic>
         <p:nvPicPr>
-          <p:cNvPr id="24" name="Image 3" descr="preencoded.png"/>
+          <p:cNvPr id="37" name="Image 5" descr="preencoded.png">    </p:cNvPr>
           <p:cNvPicPr>
             <a:picLocks noChangeAspect="1"/>
           </p:cNvPicPr>
@@ -1522,7 +2122,7 @@
         </p:blipFill>
         <p:spPr>
           <a:xfrm>
-            <a:off x="768096" y="5248656"/>
+            <a:off x="4608576" y="3419856"/>
             <a:ext cx="338328" cy="338328"/>
           </a:xfrm>
           <a:prstGeom prst="rect">
@@ -1532,13 +2132,13 @@
       </p:pic>
       <p:sp>
         <p:nvSpPr>
-          <p:cNvPr id="25" name="Text 19"/>
-          <p:cNvSpPr/>
-          <p:nvPr/>
-        </p:nvSpPr>
-        <p:spPr>
-          <a:xfrm>
-            <a:off x="1325880" y="5148072"/>
+          <p:cNvPr id="38" name="Text 30"/>
+          <p:cNvSpPr/>
+          <p:nvPr/>
+        </p:nvSpPr>
+        <p:spPr>
+          <a:xfrm>
+            <a:off x="5166360" y="3319272"/>
             <a:ext cx="2743200" cy="256032"/>
           </a:xfrm>
           <a:prstGeom prst="rect">
@@ -1551,19 +2151,19 @@
           <a:bodyPr wrap="square" lIns="0" tIns="0" rIns="0" bIns="0" rtlCol="0" anchor="ctr"/>
           <a:lstStyle/>
           <a:p>
-            <a:pPr marL="0" indent="0">
+            <a:pPr indent="0" marL="0">
               <a:buNone/>
             </a:pPr>
             <a:r>
               <a:rPr lang="en-US" sz="1100" b="1" dirty="0">
                 <a:solidFill>
-                  <a:srgbClr val="1F6FEB"/>
-                </a:solidFill>
-                <a:latin typeface="Arial" pitchFamily="34" charset="0"/>
-                <a:ea typeface="Arial" pitchFamily="34" charset="-122"/>
-                <a:cs typeface="Arial" pitchFamily="34" charset="-120"/>
-              </a:rPr>
-              <a:t>Expected impact</a:t>
+                  <a:srgbClr val="EA580C"/>
+                </a:solidFill>
+                <a:latin typeface="Arial" pitchFamily="34" charset="0"/>
+                <a:ea typeface="Arial" pitchFamily="34" charset="-122"/>
+                <a:cs typeface="Arial" pitchFamily="34" charset="-120"/>
+              </a:rPr>
+              <a:t>What we're doing</a:t>
             </a:r>
             <a:endParaRPr lang="en-US" sz="1100" dirty="0"/>
           </a:p>
@@ -1571,13 +2171,13 @@
       </p:sp>
       <p:sp>
         <p:nvSpPr>
-          <p:cNvPr id="26" name="Text 20"/>
-          <p:cNvSpPr/>
-          <p:nvPr/>
-        </p:nvSpPr>
-        <p:spPr>
-          <a:xfrm>
-            <a:off x="1325880" y="5385816"/>
+          <p:cNvPr id="39" name="Text 31"/>
+          <p:cNvSpPr/>
+          <p:nvPr/>
+        </p:nvSpPr>
+        <p:spPr>
+          <a:xfrm>
+            <a:off x="5166360" y="3557016"/>
             <a:ext cx="2697480" cy="694944"/>
           </a:xfrm>
           <a:prstGeom prst="rect">
@@ -1600,230 +2200,46 @@
             <a:r>
               <a:rPr lang="en-US" sz="950" dirty="0">
                 <a:solidFill>
-                  <a:srgbClr val="0B1F33"/>
-                </a:solidFill>
-                <a:latin typeface="Arial" pitchFamily="34" charset="0"/>
-                <a:ea typeface="Arial" pitchFamily="34" charset="-122"/>
-                <a:cs typeface="Arial" pitchFamily="34" charset="-120"/>
-              </a:rPr>
-              <a:t>$12M+ annual value potential</a:t>
+                  <a:srgbClr val="3A1A06"/>
+                </a:solidFill>
+                <a:latin typeface="Arial" pitchFamily="34" charset="0"/>
+                <a:ea typeface="Arial" pitchFamily="34" charset="-122"/>
+                <a:cs typeface="Arial" pitchFamily="34" charset="-120"/>
+              </a:rPr>
+              <a:t>Building a robust GenAI platform and governance model to ensure security, compliance, and responsible AI at scale.</a:t>
             </a:r>
             <a:endParaRPr lang="en-US" sz="950" dirty="0"/>
           </a:p>
-          <a:p>
-            <a:pPr marL="342900" indent="-342900">
-              <a:spcAft>
-                <a:spcPts val="100"/>
-              </a:spcAft>
-              <a:buSzPct val="100000"/>
-              <a:buChar char="•"/>
-            </a:pPr>
-            <a:r>
-              <a:rPr lang="en-US" sz="950" dirty="0">
-                <a:solidFill>
-                  <a:srgbClr val="0B1F33"/>
-                </a:solidFill>
-                <a:latin typeface="Arial" pitchFamily="34" charset="0"/>
-                <a:ea typeface="Arial" pitchFamily="34" charset="-122"/>
-                <a:cs typeface="Arial" pitchFamily="34" charset="-120"/>
-              </a:rPr>
-              <a:t>20–30% productivity improvement</a:t>
-            </a:r>
-            <a:endParaRPr lang="en-US" sz="950" dirty="0"/>
-          </a:p>
-          <a:p>
-            <a:pPr marL="342900" indent="-342900">
-              <a:spcAft>
-                <a:spcPts val="100"/>
-              </a:spcAft>
-              <a:buSzPct val="100000"/>
-              <a:buChar char="•"/>
-            </a:pPr>
-            <a:r>
-              <a:rPr lang="en-US" sz="950" dirty="0">
-                <a:solidFill>
-                  <a:srgbClr val="0B1F33"/>
-                </a:solidFill>
-                <a:latin typeface="Arial" pitchFamily="34" charset="0"/>
-                <a:ea typeface="Arial" pitchFamily="34" charset="-122"/>
-                <a:cs typeface="Arial" pitchFamily="34" charset="-120"/>
-              </a:rPr>
-              <a:t>Enhanced customer and employee experience</a:t>
-            </a:r>
-            <a:endParaRPr lang="en-US" sz="950" dirty="0"/>
-          </a:p>
-        </p:txBody>
-      </p:sp>
-      <p:sp>
-        <p:nvSpPr>
-          <p:cNvPr id="27" name="Shape 21"/>
-          <p:cNvSpPr/>
-          <p:nvPr/>
-        </p:nvSpPr>
-        <p:spPr>
-          <a:xfrm>
-            <a:off x="4297680" y="2423160"/>
-            <a:ext cx="3703320" cy="3657600"/>
-          </a:xfrm>
-          <a:prstGeom prst="rect">
-            <a:avLst/>
-          </a:prstGeom>
-          <a:solidFill>
-            <a:srgbClr val="FFFFFF"/>
+        </p:txBody>
+      </p:sp>
+      <p:sp>
+        <p:nvSpPr>
+          <p:cNvPr id="40" name="Shape 32"/>
+          <p:cNvSpPr/>
+          <p:nvPr/>
+        </p:nvSpPr>
+        <p:spPr>
+          <a:xfrm>
+            <a:off x="4526280" y="4251960"/>
+            <a:ext cx="502920" cy="502920"/>
+          </a:xfrm>
+          <a:prstGeom prst="rect">
+            <a:avLst/>
+          </a:prstGeom>
+          <a:solidFill>
+            <a:srgbClr val="FFEBDA"/>
           </a:solidFill>
           <a:ln w="12700">
             <a:solidFill>
-              <a:srgbClr val="E3E8EF"/>
+              <a:srgbClr val="FFEBDA"/>
             </a:solidFill>
             <a:prstDash val="solid"/>
           </a:ln>
         </p:spPr>
-        <p:txBody>
-          <a:bodyPr/>
-          <a:lstStyle/>
-          <a:p>
-            <a:endParaRPr lang="en-IN"/>
-          </a:p>
-        </p:txBody>
-      </p:sp>
-      <p:sp>
-        <p:nvSpPr>
-          <p:cNvPr id="28" name="Shape 22"/>
-          <p:cNvSpPr/>
-          <p:nvPr/>
-        </p:nvSpPr>
-        <p:spPr>
-          <a:xfrm>
-            <a:off x="4297680" y="6025896"/>
-            <a:ext cx="3703320" cy="54864"/>
-          </a:xfrm>
-          <a:prstGeom prst="rect">
-            <a:avLst/>
-          </a:prstGeom>
-          <a:solidFill>
-            <a:srgbClr val="1F6FEB"/>
-          </a:solidFill>
-          <a:ln w="12700">
-            <a:solidFill>
-              <a:srgbClr val="1F6FEB"/>
-            </a:solidFill>
-            <a:prstDash val="solid"/>
-          </a:ln>
-        </p:spPr>
-        <p:txBody>
-          <a:bodyPr/>
-          <a:lstStyle/>
-          <a:p>
-            <a:endParaRPr lang="en-IN"/>
-          </a:p>
-        </p:txBody>
-      </p:sp>
-      <p:sp>
-        <p:nvSpPr>
-          <p:cNvPr id="29" name="Shape 23"/>
-          <p:cNvSpPr/>
-          <p:nvPr/>
-        </p:nvSpPr>
-        <p:spPr>
-          <a:xfrm>
-            <a:off x="5482742" y="6025896"/>
-            <a:ext cx="1333195" cy="54864"/>
-          </a:xfrm>
-          <a:prstGeom prst="rect">
-            <a:avLst/>
-          </a:prstGeom>
-          <a:solidFill>
-            <a:srgbClr val="0B1F33"/>
-          </a:solidFill>
-          <a:ln w="12700">
-            <a:solidFill>
-              <a:srgbClr val="0B1F33"/>
-            </a:solidFill>
-            <a:prstDash val="solid"/>
-          </a:ln>
-        </p:spPr>
-        <p:txBody>
-          <a:bodyPr/>
-          <a:lstStyle/>
-          <a:p>
-            <a:endParaRPr lang="en-IN"/>
-          </a:p>
-        </p:txBody>
-      </p:sp>
-      <p:sp>
-        <p:nvSpPr>
-          <p:cNvPr id="30" name="Shape 24"/>
-          <p:cNvSpPr/>
-          <p:nvPr/>
-        </p:nvSpPr>
-        <p:spPr>
-          <a:xfrm>
-            <a:off x="4526280" y="2624328"/>
-            <a:ext cx="411480" cy="411480"/>
-          </a:xfrm>
-          <a:prstGeom prst="ellipse">
-            <a:avLst/>
-          </a:prstGeom>
-          <a:solidFill>
-            <a:srgbClr val="0B1F33"/>
-          </a:solidFill>
-          <a:ln w="12700">
-            <a:solidFill>
-              <a:srgbClr val="0B1F33"/>
-            </a:solidFill>
-            <a:prstDash val="solid"/>
-          </a:ln>
-        </p:spPr>
-        <p:txBody>
-          <a:bodyPr/>
-          <a:lstStyle/>
-          <a:p>
-            <a:endParaRPr lang="en-IN"/>
-          </a:p>
-        </p:txBody>
-      </p:sp>
-      <p:sp>
-        <p:nvSpPr>
-          <p:cNvPr id="31" name="Text 25"/>
-          <p:cNvSpPr/>
-          <p:nvPr/>
-        </p:nvSpPr>
-        <p:spPr>
-          <a:xfrm>
-            <a:off x="4526280" y="2624328"/>
-            <a:ext cx="411480" cy="411480"/>
-          </a:xfrm>
-          <a:prstGeom prst="rect">
-            <a:avLst/>
-          </a:prstGeom>
-          <a:noFill/>
-          <a:ln/>
-        </p:spPr>
-        <p:txBody>
-          <a:bodyPr wrap="square" lIns="0" tIns="0" rIns="0" bIns="0" rtlCol="0" anchor="ctr"/>
-          <a:lstStyle/>
-          <a:p>
-            <a:pPr marL="0" indent="0" algn="ctr">
-              <a:buNone/>
-            </a:pPr>
-            <a:r>
-              <a:rPr lang="en-US" sz="1400" b="1" dirty="0">
-                <a:solidFill>
-                  <a:srgbClr val="FFFFFF"/>
-                </a:solidFill>
-                <a:latin typeface="Arial" pitchFamily="34" charset="0"/>
-                <a:ea typeface="Arial" pitchFamily="34" charset="-122"/>
-                <a:cs typeface="Arial" pitchFamily="34" charset="-120"/>
-              </a:rPr>
-              <a:t>2</a:t>
-            </a:r>
-            <a:endParaRPr lang="en-US" sz="1400" dirty="0"/>
-          </a:p>
-        </p:txBody>
       </p:sp>
       <p:pic>
         <p:nvPicPr>
-          <p:cNvPr id="32" name="Image 4" descr="preencoded.png"/>
+          <p:cNvPr id="41" name="Image 6" descr="preencoded.png">    </p:cNvPr>
           <p:cNvPicPr>
             <a:picLocks noChangeAspect="1"/>
           </p:cNvPicPr>
@@ -1837,8 +2253,8 @@
         </p:blipFill>
         <p:spPr>
           <a:xfrm>
-            <a:off x="5074920" y="2651760"/>
-            <a:ext cx="384048" cy="384048"/>
+            <a:off x="4608576" y="4334256"/>
+            <a:ext cx="338328" cy="338328"/>
           </a:xfrm>
           <a:prstGeom prst="rect">
             <a:avLst/>
@@ -1847,14 +2263,14 @@
       </p:pic>
       <p:sp>
         <p:nvSpPr>
-          <p:cNvPr id="33" name="Text 26"/>
-          <p:cNvSpPr/>
-          <p:nvPr/>
-        </p:nvSpPr>
-        <p:spPr>
-          <a:xfrm>
-            <a:off x="5577840" y="2587752"/>
-            <a:ext cx="2331720" cy="292608"/>
+          <p:cNvPr id="42" name="Text 33"/>
+          <p:cNvSpPr/>
+          <p:nvPr/>
+        </p:nvSpPr>
+        <p:spPr>
+          <a:xfrm>
+            <a:off x="5166360" y="4233672"/>
+            <a:ext cx="2743200" cy="256032"/>
           </a:xfrm>
           <a:prstGeom prst="rect">
             <a:avLst/>
@@ -1866,183 +2282,19 @@
           <a:bodyPr wrap="square" lIns="0" tIns="0" rIns="0" bIns="0" rtlCol="0" anchor="ctr"/>
           <a:lstStyle/>
           <a:p>
-            <a:pPr marL="0" indent="0">
+            <a:pPr indent="0" marL="0">
               <a:buNone/>
             </a:pPr>
             <a:r>
-              <a:rPr lang="en-US" sz="1500" b="1" dirty="0">
-                <a:solidFill>
-                  <a:srgbClr val="0B1F33"/>
-                </a:solidFill>
-                <a:latin typeface="Arial" pitchFamily="34" charset="0"/>
-                <a:ea typeface="Arial" pitchFamily="34" charset="-122"/>
-                <a:cs typeface="Arial" pitchFamily="34" charset="-120"/>
-              </a:rPr>
-              <a:t>Platform &amp; Governance</a:t>
-            </a:r>
-            <a:endParaRPr lang="en-US" sz="1500" dirty="0"/>
-          </a:p>
-        </p:txBody>
-      </p:sp>
-      <p:sp>
-        <p:nvSpPr>
-          <p:cNvPr id="34" name="Text 27"/>
-          <p:cNvSpPr/>
-          <p:nvPr/>
-        </p:nvSpPr>
-        <p:spPr>
-          <a:xfrm>
-            <a:off x="5577840" y="2862072"/>
-            <a:ext cx="2331720" cy="256032"/>
-          </a:xfrm>
-          <a:prstGeom prst="rect">
-            <a:avLst/>
-          </a:prstGeom>
-          <a:noFill/>
-          <a:ln/>
-        </p:spPr>
-        <p:txBody>
-          <a:bodyPr wrap="square" lIns="0" tIns="0" rIns="0" bIns="0" rtlCol="0" anchor="ctr"/>
-          <a:lstStyle/>
-          <a:p>
-            <a:pPr marL="0" indent="0">
-              <a:buNone/>
-            </a:pPr>
-            <a:r>
-              <a:rPr lang="en-US" sz="1200" b="1" dirty="0">
-                <a:solidFill>
-                  <a:srgbClr val="1F6FEB"/>
-                </a:solidFill>
-                <a:latin typeface="Arial" pitchFamily="34" charset="0"/>
-                <a:ea typeface="Arial" pitchFamily="34" charset="-122"/>
-                <a:cs typeface="Arial" pitchFamily="34" charset="-120"/>
-              </a:rPr>
-              <a:t>Secure. Compliant. Scalable.</a:t>
-            </a:r>
-            <a:endParaRPr lang="en-US" sz="1200" dirty="0"/>
-          </a:p>
-        </p:txBody>
-      </p:sp>
-      <p:sp>
-        <p:nvSpPr>
-          <p:cNvPr id="35" name="Shape 28"/>
-          <p:cNvSpPr/>
-          <p:nvPr/>
-        </p:nvSpPr>
-        <p:spPr>
-          <a:xfrm>
-            <a:off x="4526280" y="3227832"/>
-            <a:ext cx="3246120" cy="0"/>
-          </a:xfrm>
-          <a:prstGeom prst="line">
-            <a:avLst/>
-          </a:prstGeom>
-          <a:noFill/>
-          <a:ln w="12700">
-            <a:solidFill>
-              <a:srgbClr val="E3E8EF"/>
-            </a:solidFill>
-            <a:prstDash val="solid"/>
-          </a:ln>
-        </p:spPr>
-        <p:txBody>
-          <a:bodyPr/>
-          <a:lstStyle/>
-          <a:p>
-            <a:endParaRPr lang="en-IN"/>
-          </a:p>
-        </p:txBody>
-      </p:sp>
-      <p:sp>
-        <p:nvSpPr>
-          <p:cNvPr id="36" name="Shape 29"/>
-          <p:cNvSpPr/>
-          <p:nvPr/>
-        </p:nvSpPr>
-        <p:spPr>
-          <a:xfrm>
-            <a:off x="4526280" y="3337560"/>
-            <a:ext cx="502920" cy="502920"/>
-          </a:xfrm>
-          <a:prstGeom prst="rect">
-            <a:avLst/>
-          </a:prstGeom>
-          <a:solidFill>
-            <a:srgbClr val="EEF3FB"/>
-          </a:solidFill>
-          <a:ln w="12700">
-            <a:solidFill>
-              <a:srgbClr val="EEF3FB"/>
-            </a:solidFill>
-            <a:prstDash val="solid"/>
-          </a:ln>
-        </p:spPr>
-        <p:txBody>
-          <a:bodyPr/>
-          <a:lstStyle/>
-          <a:p>
-            <a:endParaRPr lang="en-IN"/>
-          </a:p>
-        </p:txBody>
-      </p:sp>
-      <p:pic>
-        <p:nvPicPr>
-          <p:cNvPr id="37" name="Image 5" descr="preencoded.png"/>
-          <p:cNvPicPr>
-            <a:picLocks noChangeAspect="1"/>
-          </p:cNvPicPr>
-          <p:nvPr/>
-        </p:nvPicPr>
-        <p:blipFill>
-          <a:blip r:embed="rId7"/>
-          <a:stretch>
-            <a:fillRect/>
-          </a:stretch>
-        </p:blipFill>
-        <p:spPr>
-          <a:xfrm>
-            <a:off x="4608576" y="3419856"/>
-            <a:ext cx="338328" cy="338328"/>
-          </a:xfrm>
-          <a:prstGeom prst="rect">
-            <a:avLst/>
-          </a:prstGeom>
-        </p:spPr>
-      </p:pic>
-      <p:sp>
-        <p:nvSpPr>
-          <p:cNvPr id="38" name="Text 30"/>
-          <p:cNvSpPr/>
-          <p:nvPr/>
-        </p:nvSpPr>
-        <p:spPr>
-          <a:xfrm>
-            <a:off x="5166360" y="3319272"/>
-            <a:ext cx="2743200" cy="256032"/>
-          </a:xfrm>
-          <a:prstGeom prst="rect">
-            <a:avLst/>
-          </a:prstGeom>
-          <a:noFill/>
-          <a:ln/>
-        </p:spPr>
-        <p:txBody>
-          <a:bodyPr wrap="square" lIns="0" tIns="0" rIns="0" bIns="0" rtlCol="0" anchor="ctr"/>
-          <a:lstStyle/>
-          <a:p>
-            <a:pPr marL="0" indent="0">
-              <a:buNone/>
-            </a:pPr>
-            <a:r>
               <a:rPr lang="en-US" sz="1100" b="1" dirty="0">
                 <a:solidFill>
-                  <a:srgbClr val="1F6FEB"/>
-                </a:solidFill>
-                <a:latin typeface="Arial" pitchFamily="34" charset="0"/>
-                <a:ea typeface="Arial" pitchFamily="34" charset="-122"/>
-                <a:cs typeface="Arial" pitchFamily="34" charset="-120"/>
-              </a:rPr>
-              <a:t>What we're doing</a:t>
+                  <a:srgbClr val="EA580C"/>
+                </a:solidFill>
+                <a:latin typeface="Arial" pitchFamily="34" charset="0"/>
+                <a:ea typeface="Arial" pitchFamily="34" charset="-122"/>
+                <a:cs typeface="Arial" pitchFamily="34" charset="-120"/>
+              </a:rPr>
+              <a:t>Focus areas (dummy data)</a:t>
             </a:r>
             <a:endParaRPr lang="en-US" sz="1100" dirty="0"/>
           </a:p>
@@ -2050,13 +2302,13 @@
       </p:sp>
       <p:sp>
         <p:nvSpPr>
-          <p:cNvPr id="39" name="Text 31"/>
-          <p:cNvSpPr/>
-          <p:nvPr/>
-        </p:nvSpPr>
-        <p:spPr>
-          <a:xfrm>
-            <a:off x="5166360" y="3557016"/>
+          <p:cNvPr id="43" name="Text 34"/>
+          <p:cNvSpPr/>
+          <p:nvPr/>
+        </p:nvSpPr>
+        <p:spPr>
+          <a:xfrm>
+            <a:off x="5166360" y="4471416"/>
             <a:ext cx="2697480" cy="694944"/>
           </a:xfrm>
           <a:prstGeom prst="rect">
@@ -2079,53 +2331,88 @@
             <a:r>
               <a:rPr lang="en-US" sz="950" dirty="0">
                 <a:solidFill>
-                  <a:srgbClr val="0B1F33"/>
-                </a:solidFill>
-                <a:latin typeface="Arial" pitchFamily="34" charset="0"/>
-                <a:ea typeface="Arial" pitchFamily="34" charset="-122"/>
-                <a:cs typeface="Arial" pitchFamily="34" charset="-120"/>
-              </a:rPr>
-              <a:t>Building a robust GenAI platform and governance model to ensure security, compliance, and responsible AI at scale.</a:t>
+                  <a:srgbClr val="3A1A06"/>
+                </a:solidFill>
+                <a:latin typeface="Arial" pitchFamily="34" charset="0"/>
+                <a:ea typeface="Arial" pitchFamily="34" charset="-122"/>
+                <a:cs typeface="Arial" pitchFamily="34" charset="-120"/>
+              </a:rPr>
+              <a:t>Enterprise GenAI platform in build</a:t>
             </a:r>
             <a:endParaRPr lang="en-US" sz="950" dirty="0"/>
           </a:p>
-        </p:txBody>
-      </p:sp>
-      <p:sp>
-        <p:nvSpPr>
-          <p:cNvPr id="40" name="Shape 32"/>
-          <p:cNvSpPr/>
-          <p:nvPr/>
-        </p:nvSpPr>
-        <p:spPr>
-          <a:xfrm>
-            <a:off x="4526280" y="4251960"/>
+          <a:p>
+            <a:pPr marL="342900" indent="-342900">
+              <a:spcAft>
+                <a:spcPts val="100"/>
+              </a:spcAft>
+              <a:buSzPct val="100000"/>
+              <a:buChar char="•"/>
+            </a:pPr>
+            <a:r>
+              <a:rPr lang="en-US" sz="950" dirty="0">
+                <a:solidFill>
+                  <a:srgbClr val="3A1A06"/>
+                </a:solidFill>
+                <a:latin typeface="Arial" pitchFamily="34" charset="0"/>
+                <a:ea typeface="Arial" pitchFamily="34" charset="-122"/>
+                <a:cs typeface="Arial" pitchFamily="34" charset="-120"/>
+              </a:rPr>
+              <a:t>10+ governance policies defined</a:t>
+            </a:r>
+            <a:endParaRPr lang="en-US" sz="950" dirty="0"/>
+          </a:p>
+          <a:p>
+            <a:pPr marL="342900" indent="-342900">
+              <a:spcAft>
+                <a:spcPts val="100"/>
+              </a:spcAft>
+              <a:buSzPct val="100000"/>
+              <a:buChar char="•"/>
+            </a:pPr>
+            <a:r>
+              <a:rPr lang="en-US" sz="950" dirty="0">
+                <a:solidFill>
+                  <a:srgbClr val="3A1A06"/>
+                </a:solidFill>
+                <a:latin typeface="Arial" pitchFamily="34" charset="0"/>
+                <a:ea typeface="Arial" pitchFamily="34" charset="-122"/>
+                <a:cs typeface="Arial" pitchFamily="34" charset="-120"/>
+              </a:rPr>
+              <a:t>95% of use cases aligned to guardrails</a:t>
+            </a:r>
+            <a:endParaRPr lang="en-US" sz="950" dirty="0"/>
+          </a:p>
+        </p:txBody>
+      </p:sp>
+      <p:sp>
+        <p:nvSpPr>
+          <p:cNvPr id="44" name="Shape 35"/>
+          <p:cNvSpPr/>
+          <p:nvPr/>
+        </p:nvSpPr>
+        <p:spPr>
+          <a:xfrm>
+            <a:off x="4526280" y="5166360"/>
             <a:ext cx="502920" cy="502920"/>
           </a:xfrm>
           <a:prstGeom prst="rect">
             <a:avLst/>
           </a:prstGeom>
           <a:solidFill>
-            <a:srgbClr val="EEF3FB"/>
+            <a:srgbClr val="FFEBDA"/>
           </a:solidFill>
           <a:ln w="12700">
             <a:solidFill>
-              <a:srgbClr val="EEF3FB"/>
+              <a:srgbClr val="FFEBDA"/>
             </a:solidFill>
             <a:prstDash val="solid"/>
           </a:ln>
         </p:spPr>
-        <p:txBody>
-          <a:bodyPr/>
-          <a:lstStyle/>
-          <a:p>
-            <a:endParaRPr lang="en-IN"/>
-          </a:p>
-        </p:txBody>
       </p:sp>
       <p:pic>
         <p:nvPicPr>
-          <p:cNvPr id="41" name="Image 6" descr="preencoded.png"/>
+          <p:cNvPr id="45" name="Image 7" descr="preencoded.png">    </p:cNvPr>
           <p:cNvPicPr>
             <a:picLocks noChangeAspect="1"/>
           </p:cNvPicPr>
@@ -2139,7 +2426,7 @@
         </p:blipFill>
         <p:spPr>
           <a:xfrm>
-            <a:off x="4608576" y="4334256"/>
+            <a:off x="4608576" y="5248656"/>
             <a:ext cx="338328" cy="338328"/>
           </a:xfrm>
           <a:prstGeom prst="rect">
@@ -2149,13 +2436,13 @@
       </p:pic>
       <p:sp>
         <p:nvSpPr>
-          <p:cNvPr id="42" name="Text 33"/>
-          <p:cNvSpPr/>
-          <p:nvPr/>
-        </p:nvSpPr>
-        <p:spPr>
-          <a:xfrm>
-            <a:off x="5166360" y="4233672"/>
+          <p:cNvPr id="46" name="Text 36"/>
+          <p:cNvSpPr/>
+          <p:nvPr/>
+        </p:nvSpPr>
+        <p:spPr>
+          <a:xfrm>
+            <a:off x="5166360" y="5148072"/>
             <a:ext cx="2743200" cy="256032"/>
           </a:xfrm>
           <a:prstGeom prst="rect">
@@ -2168,19 +2455,19 @@
           <a:bodyPr wrap="square" lIns="0" tIns="0" rIns="0" bIns="0" rtlCol="0" anchor="ctr"/>
           <a:lstStyle/>
           <a:p>
-            <a:pPr marL="0" indent="0">
+            <a:pPr indent="0" marL="0">
               <a:buNone/>
             </a:pPr>
             <a:r>
               <a:rPr lang="en-US" sz="1100" b="1" dirty="0">
                 <a:solidFill>
-                  <a:srgbClr val="1F6FEB"/>
-                </a:solidFill>
-                <a:latin typeface="Arial" pitchFamily="34" charset="0"/>
-                <a:ea typeface="Arial" pitchFamily="34" charset="-122"/>
-                <a:cs typeface="Arial" pitchFamily="34" charset="-120"/>
-              </a:rPr>
-              <a:t>Focus areas (dummy data)</a:t>
+                  <a:srgbClr val="EA580C"/>
+                </a:solidFill>
+                <a:latin typeface="Arial" pitchFamily="34" charset="0"/>
+                <a:ea typeface="Arial" pitchFamily="34" charset="-122"/>
+                <a:cs typeface="Arial" pitchFamily="34" charset="-120"/>
+              </a:rPr>
+              <a:t>Expected impact</a:t>
             </a:r>
             <a:endParaRPr lang="en-US" sz="1100" dirty="0"/>
           </a:p>
@@ -2188,13 +2475,13 @@
       </p:sp>
       <p:sp>
         <p:nvSpPr>
-          <p:cNvPr id="43" name="Text 34"/>
-          <p:cNvSpPr/>
-          <p:nvPr/>
-        </p:nvSpPr>
-        <p:spPr>
-          <a:xfrm>
-            <a:off x="5166360" y="4471416"/>
+          <p:cNvPr id="47" name="Text 37"/>
+          <p:cNvSpPr/>
+          <p:nvPr/>
+        </p:nvSpPr>
+        <p:spPr>
+          <a:xfrm>
+            <a:off x="5166360" y="5385816"/>
             <a:ext cx="2697480" cy="694944"/>
           </a:xfrm>
           <a:prstGeom prst="rect">
@@ -2217,13 +2504,13 @@
             <a:r>
               <a:rPr lang="en-US" sz="950" dirty="0">
                 <a:solidFill>
-                  <a:srgbClr val="0B1F33"/>
-                </a:solidFill>
-                <a:latin typeface="Arial" pitchFamily="34" charset="0"/>
-                <a:ea typeface="Arial" pitchFamily="34" charset="-122"/>
-                <a:cs typeface="Arial" pitchFamily="34" charset="-120"/>
-              </a:rPr>
-              <a:t>Enterprise GenAI platform in build</a:t>
+                  <a:srgbClr val="3A1A06"/>
+                </a:solidFill>
+                <a:latin typeface="Arial" pitchFamily="34" charset="0"/>
+                <a:ea typeface="Arial" pitchFamily="34" charset="-122"/>
+                <a:cs typeface="Arial" pitchFamily="34" charset="-120"/>
+              </a:rPr>
+              <a:t>Enterprise-grade security &amp; compliance</a:t>
             </a:r>
             <a:endParaRPr lang="en-US" sz="950" dirty="0"/>
           </a:p>
@@ -2238,13 +2525,13 @@
             <a:r>
               <a:rPr lang="en-US" sz="950" dirty="0">
                 <a:solidFill>
-                  <a:srgbClr val="0B1F33"/>
-                </a:solidFill>
-                <a:latin typeface="Arial" pitchFamily="34" charset="0"/>
-                <a:ea typeface="Arial" pitchFamily="34" charset="-122"/>
-                <a:cs typeface="Arial" pitchFamily="34" charset="-120"/>
-              </a:rPr>
-              <a:t>10+ governance policies defined</a:t>
+                  <a:srgbClr val="3A1A06"/>
+                </a:solidFill>
+                <a:latin typeface="Arial" pitchFamily="34" charset="0"/>
+                <a:ea typeface="Arial" pitchFamily="34" charset="-122"/>
+                <a:cs typeface="Arial" pitchFamily="34" charset="-120"/>
+              </a:rPr>
+              <a:t>Consistent risk management</a:t>
             </a:r>
             <a:endParaRPr lang="en-US" sz="950" dirty="0"/>
           </a:p>
@@ -2259,13 +2546,13 @@
             <a:r>
               <a:rPr lang="en-US" sz="950" dirty="0">
                 <a:solidFill>
-                  <a:srgbClr val="0B1F33"/>
-                </a:solidFill>
-                <a:latin typeface="Arial" pitchFamily="34" charset="0"/>
-                <a:ea typeface="Arial" pitchFamily="34" charset="-122"/>
-                <a:cs typeface="Arial" pitchFamily="34" charset="-120"/>
-              </a:rPr>
-              <a:t>95% of use cases aligned to guardrails</a:t>
+                  <a:srgbClr val="3A1A06"/>
+                </a:solidFill>
+                <a:latin typeface="Arial" pitchFamily="34" charset="0"/>
+                <a:ea typeface="Arial" pitchFamily="34" charset="-122"/>
+                <a:cs typeface="Arial" pitchFamily="34" charset="-120"/>
+              </a:rPr>
+              <a:t>Scalable and reusable GenAI foundation</a:t>
             </a:r>
             <a:endParaRPr lang="en-US" sz="950" dirty="0"/>
           </a:p>
@@ -2273,39 +2560,146 @@
       </p:sp>
       <p:sp>
         <p:nvSpPr>
-          <p:cNvPr id="44" name="Shape 35"/>
-          <p:cNvSpPr/>
-          <p:nvPr/>
-        </p:nvSpPr>
-        <p:spPr>
-          <a:xfrm>
-            <a:off x="4526280" y="5166360"/>
-            <a:ext cx="502920" cy="502920"/>
-          </a:xfrm>
-          <a:prstGeom prst="rect">
-            <a:avLst/>
-          </a:prstGeom>
-          <a:solidFill>
-            <a:srgbClr val="EEF3FB"/>
+          <p:cNvPr id="48" name="Shape 38"/>
+          <p:cNvSpPr/>
+          <p:nvPr/>
+        </p:nvSpPr>
+        <p:spPr>
+          <a:xfrm>
+            <a:off x="8138160" y="2423160"/>
+            <a:ext cx="3703320" cy="3657600"/>
+          </a:xfrm>
+          <a:prstGeom prst="rect">
+            <a:avLst/>
+          </a:prstGeom>
+          <a:solidFill>
+            <a:srgbClr val="FFFFFF"/>
           </a:solidFill>
           <a:ln w="12700">
             <a:solidFill>
-              <a:srgbClr val="EEF3FB"/>
+              <a:srgbClr val="F2D9C6"/>
             </a:solidFill>
             <a:prstDash val="solid"/>
           </a:ln>
         </p:spPr>
-        <p:txBody>
-          <a:bodyPr/>
+      </p:sp>
+      <p:sp>
+        <p:nvSpPr>
+          <p:cNvPr id="49" name="Shape 39"/>
+          <p:cNvSpPr/>
+          <p:nvPr/>
+        </p:nvSpPr>
+        <p:spPr>
+          <a:xfrm>
+            <a:off x="8138160" y="6025896"/>
+            <a:ext cx="3703320" cy="54864"/>
+          </a:xfrm>
+          <a:prstGeom prst="rect">
+            <a:avLst/>
+          </a:prstGeom>
+          <a:solidFill>
+            <a:srgbClr val="EA580C"/>
+          </a:solidFill>
+          <a:ln w="12700">
+            <a:solidFill>
+              <a:srgbClr val="EA580C"/>
+            </a:solidFill>
+            <a:prstDash val="solid"/>
+          </a:ln>
+        </p:spPr>
+      </p:sp>
+      <p:sp>
+        <p:nvSpPr>
+          <p:cNvPr id="50" name="Shape 40"/>
+          <p:cNvSpPr/>
+          <p:nvPr/>
+        </p:nvSpPr>
+        <p:spPr>
+          <a:xfrm>
+            <a:off x="9323222" y="6025896"/>
+            <a:ext cx="1333195" cy="54864"/>
+          </a:xfrm>
+          <a:prstGeom prst="rect">
+            <a:avLst/>
+          </a:prstGeom>
+          <a:solidFill>
+            <a:srgbClr val="3A1A06"/>
+          </a:solidFill>
+          <a:ln w="12700">
+            <a:solidFill>
+              <a:srgbClr val="3A1A06"/>
+            </a:solidFill>
+            <a:prstDash val="solid"/>
+          </a:ln>
+        </p:spPr>
+      </p:sp>
+      <p:sp>
+        <p:nvSpPr>
+          <p:cNvPr id="51" name="Shape 41"/>
+          <p:cNvSpPr/>
+          <p:nvPr/>
+        </p:nvSpPr>
+        <p:spPr>
+          <a:xfrm>
+            <a:off x="8366760" y="2624328"/>
+            <a:ext cx="411480" cy="411480"/>
+          </a:xfrm>
+          <a:prstGeom prst="ellipse">
+            <a:avLst/>
+          </a:prstGeom>
+          <a:solidFill>
+            <a:srgbClr val="3A1A06"/>
+          </a:solidFill>
+          <a:ln w="12700">
+            <a:solidFill>
+              <a:srgbClr val="3A1A06"/>
+            </a:solidFill>
+            <a:prstDash val="solid"/>
+          </a:ln>
+        </p:spPr>
+      </p:sp>
+      <p:sp>
+        <p:nvSpPr>
+          <p:cNvPr id="52" name="Text 42"/>
+          <p:cNvSpPr/>
+          <p:nvPr/>
+        </p:nvSpPr>
+        <p:spPr>
+          <a:xfrm>
+            <a:off x="8366760" y="2624328"/>
+            <a:ext cx="411480" cy="411480"/>
+          </a:xfrm>
+          <a:prstGeom prst="rect">
+            <a:avLst/>
+          </a:prstGeom>
+          <a:noFill/>
+          <a:ln/>
+        </p:spPr>
+        <p:txBody>
+          <a:bodyPr wrap="square" lIns="0" tIns="0" rIns="0" bIns="0" rtlCol="0" anchor="ctr"/>
           <a:lstStyle/>
           <a:p>
-            <a:endParaRPr lang="en-IN"/>
+            <a:pPr algn="ctr" indent="0" marL="0">
+              <a:buNone/>
+            </a:pPr>
+            <a:r>
+              <a:rPr lang="en-US" sz="1400" b="1" dirty="0">
+                <a:solidFill>
+                  <a:srgbClr val="FFFFFF"/>
+                </a:solidFill>
+                <a:latin typeface="Arial" pitchFamily="34" charset="0"/>
+                <a:ea typeface="Arial" pitchFamily="34" charset="-122"/>
+                <a:cs typeface="Arial" pitchFamily="34" charset="-120"/>
+              </a:rPr>
+              <a:t>3</a:t>
+            </a:r>
+            <a:endParaRPr lang="en-US" sz="1400" dirty="0"/>
           </a:p>
         </p:txBody>
       </p:sp>
       <p:pic>
         <p:nvPicPr>
-          <p:cNvPr id="45" name="Image 7" descr="preencoded.png"/>
+          <p:cNvPr id="53" name="Image 8" descr="preencoded.png">    </p:cNvPr>
           <p:cNvPicPr>
             <a:picLocks noChangeAspect="1"/>
           </p:cNvPicPr>
@@ -2319,8 +2713,8 @@
         </p:blipFill>
         <p:spPr>
           <a:xfrm>
-            <a:off x="4608576" y="5248656"/>
-            <a:ext cx="338328" cy="338328"/>
+            <a:off x="8915400" y="2651760"/>
+            <a:ext cx="384048" cy="384048"/>
           </a:xfrm>
           <a:prstGeom prst="rect">
             <a:avLst/>
@@ -2329,14 +2723,14 @@
       </p:pic>
       <p:sp>
         <p:nvSpPr>
-          <p:cNvPr id="46" name="Text 36"/>
-          <p:cNvSpPr/>
-          <p:nvPr/>
-        </p:nvSpPr>
-        <p:spPr>
-          <a:xfrm>
-            <a:off x="5166360" y="5148072"/>
-            <a:ext cx="2743200" cy="256032"/>
+          <p:cNvPr id="54" name="Text 43"/>
+          <p:cNvSpPr/>
+          <p:nvPr/>
+        </p:nvSpPr>
+        <p:spPr>
+          <a:xfrm>
+            <a:off x="9418320" y="2587752"/>
+            <a:ext cx="2331720" cy="292608"/>
           </a:xfrm>
           <a:prstGeom prst="rect">
             <a:avLst/>
@@ -2348,34 +2742,34 @@
           <a:bodyPr wrap="square" lIns="0" tIns="0" rIns="0" bIns="0" rtlCol="0" anchor="ctr"/>
           <a:lstStyle/>
           <a:p>
-            <a:pPr marL="0" indent="0">
+            <a:pPr indent="0" marL="0">
               <a:buNone/>
             </a:pPr>
             <a:r>
-              <a:rPr lang="en-US" sz="1100" b="1" dirty="0">
-                <a:solidFill>
-                  <a:srgbClr val="1F6FEB"/>
-                </a:solidFill>
-                <a:latin typeface="Arial" pitchFamily="34" charset="0"/>
-                <a:ea typeface="Arial" pitchFamily="34" charset="-122"/>
-                <a:cs typeface="Arial" pitchFamily="34" charset="-120"/>
-              </a:rPr>
-              <a:t>Expected impact</a:t>
-            </a:r>
-            <a:endParaRPr lang="en-US" sz="1100" dirty="0"/>
-          </a:p>
-        </p:txBody>
-      </p:sp>
-      <p:sp>
-        <p:nvSpPr>
-          <p:cNvPr id="47" name="Text 37"/>
-          <p:cNvSpPr/>
-          <p:nvPr/>
-        </p:nvSpPr>
-        <p:spPr>
-          <a:xfrm>
-            <a:off x="5166360" y="5385816"/>
-            <a:ext cx="2697480" cy="694944"/>
+              <a:rPr lang="en-US" sz="1500" b="1" dirty="0">
+                <a:solidFill>
+                  <a:srgbClr val="3A1A06"/>
+                </a:solidFill>
+                <a:latin typeface="Arial" pitchFamily="34" charset="0"/>
+                <a:ea typeface="Arial" pitchFamily="34" charset="-122"/>
+                <a:cs typeface="Arial" pitchFamily="34" charset="-120"/>
+              </a:rPr>
+              <a:t>Capability &amp; Adoption</a:t>
+            </a:r>
+            <a:endParaRPr lang="en-US" sz="1500" dirty="0"/>
+          </a:p>
+        </p:txBody>
+      </p:sp>
+      <p:sp>
+        <p:nvSpPr>
+          <p:cNvPr id="55" name="Text 44"/>
+          <p:cNvSpPr/>
+          <p:nvPr/>
+        </p:nvSpPr>
+        <p:spPr>
+          <a:xfrm>
+            <a:off x="9418320" y="2862072"/>
+            <a:ext cx="2331720" cy="256032"/>
           </a:xfrm>
           <a:prstGeom prst="rect">
             <a:avLst/>
@@ -2384,243 +2778,78 @@
           <a:ln/>
         </p:spPr>
         <p:txBody>
-          <a:bodyPr wrap="square" lIns="0" tIns="0" rIns="0" bIns="0" rtlCol="0" anchor="t"/>
+          <a:bodyPr wrap="square" lIns="0" tIns="0" rIns="0" bIns="0" rtlCol="0" anchor="ctr"/>
           <a:lstStyle/>
           <a:p>
-            <a:pPr marL="342900" indent="-342900">
-              <a:spcAft>
-                <a:spcPts val="100"/>
-              </a:spcAft>
-              <a:buSzPct val="100000"/>
-              <a:buChar char="•"/>
-            </a:pPr>
-            <a:r>
-              <a:rPr lang="en-US" sz="950" dirty="0">
-                <a:solidFill>
-                  <a:srgbClr val="0B1F33"/>
-                </a:solidFill>
-                <a:latin typeface="Arial" pitchFamily="34" charset="0"/>
-                <a:ea typeface="Arial" pitchFamily="34" charset="-122"/>
-                <a:cs typeface="Arial" pitchFamily="34" charset="-120"/>
-              </a:rPr>
-              <a:t>Enterprise-grade security &amp; compliance</a:t>
-            </a:r>
-            <a:endParaRPr lang="en-US" sz="950" dirty="0"/>
-          </a:p>
-          <a:p>
-            <a:pPr marL="342900" indent="-342900">
-              <a:spcAft>
-                <a:spcPts val="100"/>
-              </a:spcAft>
-              <a:buSzPct val="100000"/>
-              <a:buChar char="•"/>
-            </a:pPr>
-            <a:r>
-              <a:rPr lang="en-US" sz="950" dirty="0">
-                <a:solidFill>
-                  <a:srgbClr val="0B1F33"/>
-                </a:solidFill>
-                <a:latin typeface="Arial" pitchFamily="34" charset="0"/>
-                <a:ea typeface="Arial" pitchFamily="34" charset="-122"/>
-                <a:cs typeface="Arial" pitchFamily="34" charset="-120"/>
-              </a:rPr>
-              <a:t>Consistent risk management</a:t>
-            </a:r>
-            <a:endParaRPr lang="en-US" sz="950" dirty="0"/>
-          </a:p>
-          <a:p>
-            <a:pPr marL="342900" indent="-342900">
-              <a:spcAft>
-                <a:spcPts val="100"/>
-              </a:spcAft>
-              <a:buSzPct val="100000"/>
-              <a:buChar char="•"/>
-            </a:pPr>
-            <a:r>
-              <a:rPr lang="en-US" sz="950" dirty="0">
-                <a:solidFill>
-                  <a:srgbClr val="0B1F33"/>
-                </a:solidFill>
-                <a:latin typeface="Arial" pitchFamily="34" charset="0"/>
-                <a:ea typeface="Arial" pitchFamily="34" charset="-122"/>
-                <a:cs typeface="Arial" pitchFamily="34" charset="-120"/>
-              </a:rPr>
-              <a:t>Scalable and reusable GenAI foundation</a:t>
-            </a:r>
-            <a:endParaRPr lang="en-US" sz="950" dirty="0"/>
-          </a:p>
-        </p:txBody>
-      </p:sp>
-      <p:sp>
-        <p:nvSpPr>
-          <p:cNvPr id="48" name="Shape 38"/>
-          <p:cNvSpPr/>
-          <p:nvPr/>
-        </p:nvSpPr>
-        <p:spPr>
-          <a:xfrm>
-            <a:off x="8138160" y="2423160"/>
-            <a:ext cx="3703320" cy="3657600"/>
-          </a:xfrm>
-          <a:prstGeom prst="rect">
-            <a:avLst/>
-          </a:prstGeom>
-          <a:solidFill>
-            <a:srgbClr val="FFFFFF"/>
-          </a:solidFill>
+            <a:pPr indent="0" marL="0">
+              <a:buNone/>
+            </a:pPr>
+            <a:r>
+              <a:rPr lang="en-US" sz="1200" b="1" dirty="0">
+                <a:solidFill>
+                  <a:srgbClr val="EA580C"/>
+                </a:solidFill>
+                <a:latin typeface="Arial" pitchFamily="34" charset="0"/>
+                <a:ea typeface="Arial" pitchFamily="34" charset="-122"/>
+                <a:cs typeface="Arial" pitchFamily="34" charset="-120"/>
+              </a:rPr>
+              <a:t>Enable. Upskill. Adopt.</a:t>
+            </a:r>
+            <a:endParaRPr lang="en-US" sz="1200" dirty="0"/>
+          </a:p>
+        </p:txBody>
+      </p:sp>
+      <p:sp>
+        <p:nvSpPr>
+          <p:cNvPr id="56" name="Shape 45"/>
+          <p:cNvSpPr/>
+          <p:nvPr/>
+        </p:nvSpPr>
+        <p:spPr>
+          <a:xfrm>
+            <a:off x="8366760" y="3227832"/>
+            <a:ext cx="3246120" cy="0"/>
+          </a:xfrm>
+          <a:prstGeom prst="line">
+            <a:avLst/>
+          </a:prstGeom>
+          <a:noFill/>
           <a:ln w="12700">
             <a:solidFill>
-              <a:srgbClr val="E3E8EF"/>
+              <a:srgbClr val="F2D9C6"/>
             </a:solidFill>
             <a:prstDash val="solid"/>
           </a:ln>
         </p:spPr>
-        <p:txBody>
-          <a:bodyPr/>
-          <a:lstStyle/>
-          <a:p>
-            <a:endParaRPr lang="en-IN"/>
-          </a:p>
-        </p:txBody>
-      </p:sp>
-      <p:sp>
-        <p:nvSpPr>
-          <p:cNvPr id="49" name="Shape 39"/>
-          <p:cNvSpPr/>
-          <p:nvPr/>
-        </p:nvSpPr>
-        <p:spPr>
-          <a:xfrm>
-            <a:off x="8138160" y="6025896"/>
-            <a:ext cx="3703320" cy="54864"/>
-          </a:xfrm>
-          <a:prstGeom prst="rect">
-            <a:avLst/>
-          </a:prstGeom>
-          <a:solidFill>
-            <a:srgbClr val="1F6FEB"/>
+      </p:sp>
+      <p:sp>
+        <p:nvSpPr>
+          <p:cNvPr id="57" name="Shape 46"/>
+          <p:cNvSpPr/>
+          <p:nvPr/>
+        </p:nvSpPr>
+        <p:spPr>
+          <a:xfrm>
+            <a:off x="8366760" y="3337560"/>
+            <a:ext cx="502920" cy="502920"/>
+          </a:xfrm>
+          <a:prstGeom prst="rect">
+            <a:avLst/>
+          </a:prstGeom>
+          <a:solidFill>
+            <a:srgbClr val="FFEBDA"/>
           </a:solidFill>
           <a:ln w="12700">
             <a:solidFill>
-              <a:srgbClr val="1F6FEB"/>
+              <a:srgbClr val="FFEBDA"/>
             </a:solidFill>
             <a:prstDash val="solid"/>
           </a:ln>
         </p:spPr>
-        <p:txBody>
-          <a:bodyPr/>
-          <a:lstStyle/>
-          <a:p>
-            <a:endParaRPr lang="en-IN"/>
-          </a:p>
-        </p:txBody>
-      </p:sp>
-      <p:sp>
-        <p:nvSpPr>
-          <p:cNvPr id="50" name="Shape 40"/>
-          <p:cNvSpPr/>
-          <p:nvPr/>
-        </p:nvSpPr>
-        <p:spPr>
-          <a:xfrm>
-            <a:off x="9323222" y="6025896"/>
-            <a:ext cx="1333195" cy="54864"/>
-          </a:xfrm>
-          <a:prstGeom prst="rect">
-            <a:avLst/>
-          </a:prstGeom>
-          <a:solidFill>
-            <a:srgbClr val="0B1F33"/>
-          </a:solidFill>
-          <a:ln w="12700">
-            <a:solidFill>
-              <a:srgbClr val="0B1F33"/>
-            </a:solidFill>
-            <a:prstDash val="solid"/>
-          </a:ln>
-        </p:spPr>
-        <p:txBody>
-          <a:bodyPr/>
-          <a:lstStyle/>
-          <a:p>
-            <a:endParaRPr lang="en-IN"/>
-          </a:p>
-        </p:txBody>
-      </p:sp>
-      <p:sp>
-        <p:nvSpPr>
-          <p:cNvPr id="51" name="Shape 41"/>
-          <p:cNvSpPr/>
-          <p:nvPr/>
-        </p:nvSpPr>
-        <p:spPr>
-          <a:xfrm>
-            <a:off x="8366760" y="2624328"/>
-            <a:ext cx="411480" cy="411480"/>
-          </a:xfrm>
-          <a:prstGeom prst="ellipse">
-            <a:avLst/>
-          </a:prstGeom>
-          <a:solidFill>
-            <a:srgbClr val="0B1F33"/>
-          </a:solidFill>
-          <a:ln w="12700">
-            <a:solidFill>
-              <a:srgbClr val="0B1F33"/>
-            </a:solidFill>
-            <a:prstDash val="solid"/>
-          </a:ln>
-        </p:spPr>
-        <p:txBody>
-          <a:bodyPr/>
-          <a:lstStyle/>
-          <a:p>
-            <a:endParaRPr lang="en-IN"/>
-          </a:p>
-        </p:txBody>
-      </p:sp>
-      <p:sp>
-        <p:nvSpPr>
-          <p:cNvPr id="52" name="Text 42"/>
-          <p:cNvSpPr/>
-          <p:nvPr/>
-        </p:nvSpPr>
-        <p:spPr>
-          <a:xfrm>
-            <a:off x="8366760" y="2624328"/>
-            <a:ext cx="411480" cy="411480"/>
-          </a:xfrm>
-          <a:prstGeom prst="rect">
-            <a:avLst/>
-          </a:prstGeom>
-          <a:noFill/>
-          <a:ln/>
-        </p:spPr>
-        <p:txBody>
-          <a:bodyPr wrap="square" lIns="0" tIns="0" rIns="0" bIns="0" rtlCol="0" anchor="ctr"/>
-          <a:lstStyle/>
-          <a:p>
-            <a:pPr marL="0" indent="0" algn="ctr">
-              <a:buNone/>
-            </a:pPr>
-            <a:r>
-              <a:rPr lang="en-US" sz="1400" b="1" dirty="0">
-                <a:solidFill>
-                  <a:srgbClr val="FFFFFF"/>
-                </a:solidFill>
-                <a:latin typeface="Arial" pitchFamily="34" charset="0"/>
-                <a:ea typeface="Arial" pitchFamily="34" charset="-122"/>
-                <a:cs typeface="Arial" pitchFamily="34" charset="-120"/>
-              </a:rPr>
-              <a:t>3</a:t>
-            </a:r>
-            <a:endParaRPr lang="en-US" sz="1400" dirty="0"/>
-          </a:p>
-        </p:txBody>
       </p:sp>
       <p:pic>
         <p:nvPicPr>
-          <p:cNvPr id="53" name="Image 8" descr="preencoded.png"/>
+          <p:cNvPr id="58" name="Image 9" descr="preencoded.png">    </p:cNvPr>
           <p:cNvPicPr>
             <a:picLocks noChangeAspect="1"/>
           </p:cNvPicPr>
@@ -2634,8 +2863,8 @@
         </p:blipFill>
         <p:spPr>
           <a:xfrm>
-            <a:off x="8915400" y="2651760"/>
-            <a:ext cx="384048" cy="384048"/>
+            <a:off x="8449056" y="3419856"/>
+            <a:ext cx="338328" cy="338328"/>
           </a:xfrm>
           <a:prstGeom prst="rect">
             <a:avLst/>
@@ -2644,14 +2873,14 @@
       </p:pic>
       <p:sp>
         <p:nvSpPr>
-          <p:cNvPr id="54" name="Text 43"/>
-          <p:cNvSpPr/>
-          <p:nvPr/>
-        </p:nvSpPr>
-        <p:spPr>
-          <a:xfrm>
-            <a:off x="9418320" y="2587752"/>
-            <a:ext cx="2331720" cy="292608"/>
+          <p:cNvPr id="59" name="Text 47"/>
+          <p:cNvSpPr/>
+          <p:nvPr/>
+        </p:nvSpPr>
+        <p:spPr>
+          <a:xfrm>
+            <a:off x="9006840" y="3319272"/>
+            <a:ext cx="2743200" cy="256032"/>
           </a:xfrm>
           <a:prstGeom prst="rect">
             <a:avLst/>
@@ -2663,177 +2892,13 @@
           <a:bodyPr wrap="square" lIns="0" tIns="0" rIns="0" bIns="0" rtlCol="0" anchor="ctr"/>
           <a:lstStyle/>
           <a:p>
-            <a:pPr marL="0" indent="0">
+            <a:pPr indent="0" marL="0">
               <a:buNone/>
             </a:pPr>
             <a:r>
-              <a:rPr lang="en-US" sz="1500" b="1" dirty="0">
-                <a:solidFill>
-                  <a:srgbClr val="0B1F33"/>
-                </a:solidFill>
-                <a:latin typeface="Arial" pitchFamily="34" charset="0"/>
-                <a:ea typeface="Arial" pitchFamily="34" charset="-122"/>
-                <a:cs typeface="Arial" pitchFamily="34" charset="-120"/>
-              </a:rPr>
-              <a:t>Capability &amp; Adoption</a:t>
-            </a:r>
-            <a:endParaRPr lang="en-US" sz="1500" dirty="0"/>
-          </a:p>
-        </p:txBody>
-      </p:sp>
-      <p:sp>
-        <p:nvSpPr>
-          <p:cNvPr id="55" name="Text 44"/>
-          <p:cNvSpPr/>
-          <p:nvPr/>
-        </p:nvSpPr>
-        <p:spPr>
-          <a:xfrm>
-            <a:off x="9418320" y="2862072"/>
-            <a:ext cx="2331720" cy="256032"/>
-          </a:xfrm>
-          <a:prstGeom prst="rect">
-            <a:avLst/>
-          </a:prstGeom>
-          <a:noFill/>
-          <a:ln/>
-        </p:spPr>
-        <p:txBody>
-          <a:bodyPr wrap="square" lIns="0" tIns="0" rIns="0" bIns="0" rtlCol="0" anchor="ctr"/>
-          <a:lstStyle/>
-          <a:p>
-            <a:pPr marL="0" indent="0">
-              <a:buNone/>
-            </a:pPr>
-            <a:r>
-              <a:rPr lang="en-US" sz="1200" b="1" dirty="0">
-                <a:solidFill>
-                  <a:srgbClr val="1F6FEB"/>
-                </a:solidFill>
-                <a:latin typeface="Arial" pitchFamily="34" charset="0"/>
-                <a:ea typeface="Arial" pitchFamily="34" charset="-122"/>
-                <a:cs typeface="Arial" pitchFamily="34" charset="-120"/>
-              </a:rPr>
-              <a:t>Enable. Upskill. Adopt.</a:t>
-            </a:r>
-            <a:endParaRPr lang="en-US" sz="1200" dirty="0"/>
-          </a:p>
-        </p:txBody>
-      </p:sp>
-      <p:sp>
-        <p:nvSpPr>
-          <p:cNvPr id="56" name="Shape 45"/>
-          <p:cNvSpPr/>
-          <p:nvPr/>
-        </p:nvSpPr>
-        <p:spPr>
-          <a:xfrm>
-            <a:off x="8366760" y="3227832"/>
-            <a:ext cx="3246120" cy="0"/>
-          </a:xfrm>
-          <a:prstGeom prst="line">
-            <a:avLst/>
-          </a:prstGeom>
-          <a:noFill/>
-          <a:ln w="12700">
-            <a:solidFill>
-              <a:srgbClr val="E3E8EF"/>
-            </a:solidFill>
-            <a:prstDash val="solid"/>
-          </a:ln>
-        </p:spPr>
-        <p:txBody>
-          <a:bodyPr/>
-          <a:lstStyle/>
-          <a:p>
-            <a:endParaRPr lang="en-IN"/>
-          </a:p>
-        </p:txBody>
-      </p:sp>
-      <p:sp>
-        <p:nvSpPr>
-          <p:cNvPr id="57" name="Shape 46"/>
-          <p:cNvSpPr/>
-          <p:nvPr/>
-        </p:nvSpPr>
-        <p:spPr>
-          <a:xfrm>
-            <a:off x="8366760" y="3337560"/>
-            <a:ext cx="502920" cy="502920"/>
-          </a:xfrm>
-          <a:prstGeom prst="rect">
-            <a:avLst/>
-          </a:prstGeom>
-          <a:solidFill>
-            <a:srgbClr val="EEF3FB"/>
-          </a:solidFill>
-          <a:ln w="12700">
-            <a:solidFill>
-              <a:srgbClr val="EEF3FB"/>
-            </a:solidFill>
-            <a:prstDash val="solid"/>
-          </a:ln>
-        </p:spPr>
-        <p:txBody>
-          <a:bodyPr/>
-          <a:lstStyle/>
-          <a:p>
-            <a:endParaRPr lang="en-IN"/>
-          </a:p>
-        </p:txBody>
-      </p:sp>
-      <p:pic>
-        <p:nvPicPr>
-          <p:cNvPr id="58" name="Image 9" descr="preencoded.png"/>
-          <p:cNvPicPr>
-            <a:picLocks noChangeAspect="1"/>
-          </p:cNvPicPr>
-          <p:nvPr/>
-        </p:nvPicPr>
-        <p:blipFill>
-          <a:blip r:embed="rId3"/>
-          <a:stretch>
-            <a:fillRect/>
-          </a:stretch>
-        </p:blipFill>
-        <p:spPr>
-          <a:xfrm>
-            <a:off x="8449056" y="3419856"/>
-            <a:ext cx="338328" cy="338328"/>
-          </a:xfrm>
-          <a:prstGeom prst="rect">
-            <a:avLst/>
-          </a:prstGeom>
-        </p:spPr>
-      </p:pic>
-      <p:sp>
-        <p:nvSpPr>
-          <p:cNvPr id="59" name="Text 47"/>
-          <p:cNvSpPr/>
-          <p:nvPr/>
-        </p:nvSpPr>
-        <p:spPr>
-          <a:xfrm>
-            <a:off x="9006840" y="3319272"/>
-            <a:ext cx="2743200" cy="256032"/>
-          </a:xfrm>
-          <a:prstGeom prst="rect">
-            <a:avLst/>
-          </a:prstGeom>
-          <a:noFill/>
-          <a:ln/>
-        </p:spPr>
-        <p:txBody>
-          <a:bodyPr wrap="square" lIns="0" tIns="0" rIns="0" bIns="0" rtlCol="0" anchor="ctr"/>
-          <a:lstStyle/>
-          <a:p>
-            <a:pPr marL="0" indent="0">
-              <a:buNone/>
-            </a:pPr>
-            <a:r>
               <a:rPr lang="en-US" sz="1100" b="1" dirty="0">
                 <a:solidFill>
-                  <a:srgbClr val="1F6FEB"/>
+                  <a:srgbClr val="EA580C"/>
                 </a:solidFill>
                 <a:latin typeface="Arial" pitchFamily="34" charset="0"/>
                 <a:ea typeface="Arial" pitchFamily="34" charset="-122"/>
@@ -2876,7 +2941,7 @@
             <a:r>
               <a:rPr lang="en-US" sz="950" dirty="0">
                 <a:solidFill>
-                  <a:srgbClr val="0B1F33"/>
+                  <a:srgbClr val="3A1A06"/>
                 </a:solidFill>
                 <a:latin typeface="Arial" pitchFamily="34" charset="0"/>
                 <a:ea typeface="Arial" pitchFamily="34" charset="-122"/>
@@ -2903,26 +2968,19 @@
             <a:avLst/>
           </a:prstGeom>
           <a:solidFill>
-            <a:srgbClr val="EEF3FB"/>
+            <a:srgbClr val="FFEBDA"/>
           </a:solidFill>
           <a:ln w="12700">
             <a:solidFill>
-              <a:srgbClr val="EEF3FB"/>
+              <a:srgbClr val="FFEBDA"/>
             </a:solidFill>
             <a:prstDash val="solid"/>
           </a:ln>
         </p:spPr>
-        <p:txBody>
-          <a:bodyPr/>
-          <a:lstStyle/>
-          <a:p>
-            <a:endParaRPr lang="en-IN"/>
-          </a:p>
-        </p:txBody>
       </p:sp>
       <p:pic>
         <p:nvPicPr>
-          <p:cNvPr id="62" name="Image 10" descr="preencoded.png"/>
+          <p:cNvPr id="62" name="Image 10" descr="preencoded.png">    </p:cNvPr>
           <p:cNvPicPr>
             <a:picLocks noChangeAspect="1"/>
           </p:cNvPicPr>
@@ -2965,13 +3023,13 @@
           <a:bodyPr wrap="square" lIns="0" tIns="0" rIns="0" bIns="0" rtlCol="0" anchor="ctr"/>
           <a:lstStyle/>
           <a:p>
-            <a:pPr marL="0" indent="0">
+            <a:pPr indent="0" marL="0">
               <a:buNone/>
             </a:pPr>
             <a:r>
               <a:rPr lang="en-US" sz="1100" b="1" dirty="0">
                 <a:solidFill>
-                  <a:srgbClr val="1F6FEB"/>
+                  <a:srgbClr val="EA580C"/>
                 </a:solidFill>
                 <a:latin typeface="Arial" pitchFamily="34" charset="0"/>
                 <a:ea typeface="Arial" pitchFamily="34" charset="-122"/>
@@ -3014,7 +3072,7 @@
             <a:r>
               <a:rPr lang="en-US" sz="950" dirty="0">
                 <a:solidFill>
-                  <a:srgbClr val="0B1F33"/>
+                  <a:srgbClr val="3A1A06"/>
                 </a:solidFill>
                 <a:latin typeface="Arial" pitchFamily="34" charset="0"/>
                 <a:ea typeface="Arial" pitchFamily="34" charset="-122"/>
@@ -3035,7 +3093,7 @@
             <a:r>
               <a:rPr lang="en-US" sz="950" dirty="0">
                 <a:solidFill>
-                  <a:srgbClr val="0B1F33"/>
+                  <a:srgbClr val="3A1A06"/>
                 </a:solidFill>
                 <a:latin typeface="Arial" pitchFamily="34" charset="0"/>
                 <a:ea typeface="Arial" pitchFamily="34" charset="-122"/>
@@ -3056,7 +3114,7 @@
             <a:r>
               <a:rPr lang="en-US" sz="950" dirty="0">
                 <a:solidFill>
-                  <a:srgbClr val="0B1F33"/>
+                  <a:srgbClr val="3A1A06"/>
                 </a:solidFill>
                 <a:latin typeface="Arial" pitchFamily="34" charset="0"/>
                 <a:ea typeface="Arial" pitchFamily="34" charset="-122"/>
@@ -3083,206 +3141,19 @@
             <a:avLst/>
           </a:prstGeom>
           <a:solidFill>
-            <a:srgbClr val="EEF3FB"/>
+            <a:srgbClr val="FFEBDA"/>
           </a:solidFill>
           <a:ln w="12700">
             <a:solidFill>
-              <a:srgbClr val="EEF3FB"/>
+              <a:srgbClr val="FFEBDA"/>
             </a:solidFill>
             <a:prstDash val="solid"/>
           </a:ln>
         </p:spPr>
-        <p:txBody>
-          <a:bodyPr/>
-          <a:lstStyle/>
-          <a:p>
-            <a:endParaRPr lang="en-IN"/>
-          </a:p>
-        </p:txBody>
       </p:sp>
       <p:pic>
         <p:nvPicPr>
-          <p:cNvPr id="66" name="Image 11" descr="preencoded.png"/>
-          <p:cNvPicPr>
-            <a:picLocks noChangeAspect="1"/>
-          </p:cNvPicPr>
-          <p:nvPr/>
-        </p:nvPicPr>
-        <p:blipFill>
-          <a:blip r:embed="rId10"/>
-          <a:stretch>
-            <a:fillRect/>
-          </a:stretch>
-        </p:blipFill>
-        <p:spPr>
-          <a:xfrm>
-            <a:off x="8449056" y="5248656"/>
-            <a:ext cx="338328" cy="338328"/>
-          </a:xfrm>
-          <a:prstGeom prst="rect">
-            <a:avLst/>
-          </a:prstGeom>
-        </p:spPr>
-      </p:pic>
-      <p:sp>
-        <p:nvSpPr>
-          <p:cNvPr id="67" name="Text 53"/>
-          <p:cNvSpPr/>
-          <p:nvPr/>
-        </p:nvSpPr>
-        <p:spPr>
-          <a:xfrm>
-            <a:off x="9006840" y="5148072"/>
-            <a:ext cx="2743200" cy="256032"/>
-          </a:xfrm>
-          <a:prstGeom prst="rect">
-            <a:avLst/>
-          </a:prstGeom>
-          <a:noFill/>
-          <a:ln/>
-        </p:spPr>
-        <p:txBody>
-          <a:bodyPr wrap="square" lIns="0" tIns="0" rIns="0" bIns="0" rtlCol="0" anchor="ctr"/>
-          <a:lstStyle/>
-          <a:p>
-            <a:pPr marL="0" indent="0">
-              <a:buNone/>
-            </a:pPr>
-            <a:r>
-              <a:rPr lang="en-US" sz="1100" b="1" dirty="0">
-                <a:solidFill>
-                  <a:srgbClr val="1F6FEB"/>
-                </a:solidFill>
-                <a:latin typeface="Arial" pitchFamily="34" charset="0"/>
-                <a:ea typeface="Arial" pitchFamily="34" charset="-122"/>
-                <a:cs typeface="Arial" pitchFamily="34" charset="-120"/>
-              </a:rPr>
-              <a:t>Expected impact</a:t>
-            </a:r>
-            <a:endParaRPr lang="en-US" sz="1100" dirty="0"/>
-          </a:p>
-        </p:txBody>
-      </p:sp>
-      <p:sp>
-        <p:nvSpPr>
-          <p:cNvPr id="68" name="Text 54"/>
-          <p:cNvSpPr/>
-          <p:nvPr/>
-        </p:nvSpPr>
-        <p:spPr>
-          <a:xfrm>
-            <a:off x="9006840" y="5385816"/>
-            <a:ext cx="2697480" cy="694944"/>
-          </a:xfrm>
-          <a:prstGeom prst="rect">
-            <a:avLst/>
-          </a:prstGeom>
-          <a:noFill/>
-          <a:ln/>
-        </p:spPr>
-        <p:txBody>
-          <a:bodyPr wrap="square" lIns="0" tIns="0" rIns="0" bIns="0" rtlCol="0" anchor="t"/>
-          <a:lstStyle/>
-          <a:p>
-            <a:pPr marL="342900" indent="-342900">
-              <a:spcAft>
-                <a:spcPts val="100"/>
-              </a:spcAft>
-              <a:buSzPct val="100000"/>
-              <a:buChar char="•"/>
-            </a:pPr>
-            <a:r>
-              <a:rPr lang="en-US" sz="950" dirty="0">
-                <a:solidFill>
-                  <a:srgbClr val="0B1F33"/>
-                </a:solidFill>
-                <a:latin typeface="Arial" pitchFamily="34" charset="0"/>
-                <a:ea typeface="Arial" pitchFamily="34" charset="-122"/>
-                <a:cs typeface="Arial" pitchFamily="34" charset="-120"/>
-              </a:rPr>
-              <a:t>High user adoption and retention</a:t>
-            </a:r>
-            <a:endParaRPr lang="en-US" sz="950" dirty="0"/>
-          </a:p>
-          <a:p>
-            <a:pPr marL="342900" indent="-342900">
-              <a:spcAft>
-                <a:spcPts val="100"/>
-              </a:spcAft>
-              <a:buSzPct val="100000"/>
-              <a:buChar char="•"/>
-            </a:pPr>
-            <a:r>
-              <a:rPr lang="en-US" sz="950" dirty="0">
-                <a:solidFill>
-                  <a:srgbClr val="0B1F33"/>
-                </a:solidFill>
-                <a:latin typeface="Arial" pitchFamily="34" charset="0"/>
-                <a:ea typeface="Arial" pitchFamily="34" charset="-122"/>
-                <a:cs typeface="Arial" pitchFamily="34" charset="-120"/>
-              </a:rPr>
-              <a:t>Strong GenAI culture and mindset</a:t>
-            </a:r>
-            <a:endParaRPr lang="en-US" sz="950" dirty="0"/>
-          </a:p>
-          <a:p>
-            <a:pPr marL="342900" indent="-342900">
-              <a:spcAft>
-                <a:spcPts val="100"/>
-              </a:spcAft>
-              <a:buSzPct val="100000"/>
-              <a:buChar char="•"/>
-            </a:pPr>
-            <a:r>
-              <a:rPr lang="en-US" sz="950" dirty="0">
-                <a:solidFill>
-                  <a:srgbClr val="0B1F33"/>
-                </a:solidFill>
-                <a:latin typeface="Arial" pitchFamily="34" charset="0"/>
-                <a:ea typeface="Arial" pitchFamily="34" charset="-122"/>
-                <a:cs typeface="Arial" pitchFamily="34" charset="-120"/>
-              </a:rPr>
-              <a:t>Continuous learning and innovation</a:t>
-            </a:r>
-            <a:endParaRPr lang="en-US" sz="950" dirty="0"/>
-          </a:p>
-        </p:txBody>
-      </p:sp>
-      <p:sp>
-        <p:nvSpPr>
-          <p:cNvPr id="69" name="Shape 55"/>
-          <p:cNvSpPr/>
-          <p:nvPr/>
-        </p:nvSpPr>
-        <p:spPr>
-          <a:xfrm>
-            <a:off x="457200" y="6263640"/>
-            <a:ext cx="11247120" cy="411480"/>
-          </a:xfrm>
-          <a:prstGeom prst="rect">
-            <a:avLst/>
-          </a:prstGeom>
-          <a:solidFill>
-            <a:srgbClr val="F5F8FE"/>
-          </a:solidFill>
-          <a:ln w="12700">
-            <a:solidFill>
-              <a:srgbClr val="F5F8FE"/>
-            </a:solidFill>
-            <a:prstDash val="solid"/>
-          </a:ln>
-        </p:spPr>
-        <p:txBody>
-          <a:bodyPr/>
-          <a:lstStyle/>
-          <a:p>
-            <a:endParaRPr lang="en-IN"/>
-          </a:p>
-        </p:txBody>
-      </p:sp>
-      <p:pic>
-        <p:nvPicPr>
-          <p:cNvPr id="70" name="Image 12" descr="preencoded.png"/>
+          <p:cNvPr id="66" name="Image 11" descr="preencoded.png">    </p:cNvPr>
           <p:cNvPicPr>
             <a:picLocks noChangeAspect="1"/>
           </p:cNvPicPr>
@@ -3296,6 +3167,179 @@
         </p:blipFill>
         <p:spPr>
           <a:xfrm>
+            <a:off x="8449056" y="5248656"/>
+            <a:ext cx="338328" cy="338328"/>
+          </a:xfrm>
+          <a:prstGeom prst="rect">
+            <a:avLst/>
+          </a:prstGeom>
+        </p:spPr>
+      </p:pic>
+      <p:sp>
+        <p:nvSpPr>
+          <p:cNvPr id="67" name="Text 53"/>
+          <p:cNvSpPr/>
+          <p:nvPr/>
+        </p:nvSpPr>
+        <p:spPr>
+          <a:xfrm>
+            <a:off x="9006840" y="5148072"/>
+            <a:ext cx="2743200" cy="256032"/>
+          </a:xfrm>
+          <a:prstGeom prst="rect">
+            <a:avLst/>
+          </a:prstGeom>
+          <a:noFill/>
+          <a:ln/>
+        </p:spPr>
+        <p:txBody>
+          <a:bodyPr wrap="square" lIns="0" tIns="0" rIns="0" bIns="0" rtlCol="0" anchor="ctr"/>
+          <a:lstStyle/>
+          <a:p>
+            <a:pPr indent="0" marL="0">
+              <a:buNone/>
+            </a:pPr>
+            <a:r>
+              <a:rPr lang="en-US" sz="1100" b="1" dirty="0">
+                <a:solidFill>
+                  <a:srgbClr val="EA580C"/>
+                </a:solidFill>
+                <a:latin typeface="Arial" pitchFamily="34" charset="0"/>
+                <a:ea typeface="Arial" pitchFamily="34" charset="-122"/>
+                <a:cs typeface="Arial" pitchFamily="34" charset="-120"/>
+              </a:rPr>
+              <a:t>Expected impact</a:t>
+            </a:r>
+            <a:endParaRPr lang="en-US" sz="1100" dirty="0"/>
+          </a:p>
+        </p:txBody>
+      </p:sp>
+      <p:sp>
+        <p:nvSpPr>
+          <p:cNvPr id="68" name="Text 54"/>
+          <p:cNvSpPr/>
+          <p:nvPr/>
+        </p:nvSpPr>
+        <p:spPr>
+          <a:xfrm>
+            <a:off x="9006840" y="5385816"/>
+            <a:ext cx="2697480" cy="694944"/>
+          </a:xfrm>
+          <a:prstGeom prst="rect">
+            <a:avLst/>
+          </a:prstGeom>
+          <a:noFill/>
+          <a:ln/>
+        </p:spPr>
+        <p:txBody>
+          <a:bodyPr wrap="square" lIns="0" tIns="0" rIns="0" bIns="0" rtlCol="0" anchor="t"/>
+          <a:lstStyle/>
+          <a:p>
+            <a:pPr marL="342900" indent="-342900">
+              <a:spcAft>
+                <a:spcPts val="100"/>
+              </a:spcAft>
+              <a:buSzPct val="100000"/>
+              <a:buChar char="•"/>
+            </a:pPr>
+            <a:r>
+              <a:rPr lang="en-US" sz="950" dirty="0">
+                <a:solidFill>
+                  <a:srgbClr val="3A1A06"/>
+                </a:solidFill>
+                <a:latin typeface="Arial" pitchFamily="34" charset="0"/>
+                <a:ea typeface="Arial" pitchFamily="34" charset="-122"/>
+                <a:cs typeface="Arial" pitchFamily="34" charset="-120"/>
+              </a:rPr>
+              <a:t>High user adoption and retention</a:t>
+            </a:r>
+            <a:endParaRPr lang="en-US" sz="950" dirty="0"/>
+          </a:p>
+          <a:p>
+            <a:pPr marL="342900" indent="-342900">
+              <a:spcAft>
+                <a:spcPts val="100"/>
+              </a:spcAft>
+              <a:buSzPct val="100000"/>
+              <a:buChar char="•"/>
+            </a:pPr>
+            <a:r>
+              <a:rPr lang="en-US" sz="950" dirty="0">
+                <a:solidFill>
+                  <a:srgbClr val="3A1A06"/>
+                </a:solidFill>
+                <a:latin typeface="Arial" pitchFamily="34" charset="0"/>
+                <a:ea typeface="Arial" pitchFamily="34" charset="-122"/>
+                <a:cs typeface="Arial" pitchFamily="34" charset="-120"/>
+              </a:rPr>
+              <a:t>Strong GenAI culture and mindset</a:t>
+            </a:r>
+            <a:endParaRPr lang="en-US" sz="950" dirty="0"/>
+          </a:p>
+          <a:p>
+            <a:pPr marL="342900" indent="-342900">
+              <a:spcAft>
+                <a:spcPts val="100"/>
+              </a:spcAft>
+              <a:buSzPct val="100000"/>
+              <a:buChar char="•"/>
+            </a:pPr>
+            <a:r>
+              <a:rPr lang="en-US" sz="950" dirty="0">
+                <a:solidFill>
+                  <a:srgbClr val="3A1A06"/>
+                </a:solidFill>
+                <a:latin typeface="Arial" pitchFamily="34" charset="0"/>
+                <a:ea typeface="Arial" pitchFamily="34" charset="-122"/>
+                <a:cs typeface="Arial" pitchFamily="34" charset="-120"/>
+              </a:rPr>
+              <a:t>Continuous learning and innovation</a:t>
+            </a:r>
+            <a:endParaRPr lang="en-US" sz="950" dirty="0"/>
+          </a:p>
+        </p:txBody>
+      </p:sp>
+      <p:sp>
+        <p:nvSpPr>
+          <p:cNvPr id="69" name="Shape 55"/>
+          <p:cNvSpPr/>
+          <p:nvPr/>
+        </p:nvSpPr>
+        <p:spPr>
+          <a:xfrm>
+            <a:off x="457200" y="6263640"/>
+            <a:ext cx="11247120" cy="411480"/>
+          </a:xfrm>
+          <a:prstGeom prst="rect">
+            <a:avLst/>
+          </a:prstGeom>
+          <a:solidFill>
+            <a:srgbClr val="FFF3EA"/>
+          </a:solidFill>
+          <a:ln w="12700">
+            <a:solidFill>
+              <a:srgbClr val="FFF3EA"/>
+            </a:solidFill>
+            <a:prstDash val="solid"/>
+          </a:ln>
+        </p:spPr>
+      </p:sp>
+      <p:pic>
+        <p:nvPicPr>
+          <p:cNvPr id="70" name="Image 12" descr="preencoded.png">    </p:cNvPr>
+          <p:cNvPicPr>
+            <a:picLocks noChangeAspect="1"/>
+          </p:cNvPicPr>
+          <p:nvPr/>
+        </p:nvPicPr>
+        <p:blipFill>
+          <a:blip r:embed="rId13"/>
+          <a:stretch>
+            <a:fillRect/>
+          </a:stretch>
+        </p:blipFill>
+        <p:spPr>
+          <a:xfrm>
             <a:off x="640080" y="6336792"/>
             <a:ext cx="274320" cy="274320"/>
           </a:xfrm>
@@ -3325,13 +3369,13 @@
           <a:bodyPr wrap="square" lIns="0" tIns="0" rIns="0" bIns="0" rtlCol="0" anchor="ctr"/>
           <a:lstStyle/>
           <a:p>
-            <a:pPr marL="0" indent="0">
+            <a:pPr indent="0" marL="0">
               <a:buNone/>
             </a:pPr>
             <a:r>
               <a:rPr lang="en-US" sz="1150" b="1" dirty="0">
                 <a:solidFill>
-                  <a:srgbClr val="0B1F33"/>
+                  <a:srgbClr val="3A1A06"/>
                 </a:solidFill>
                 <a:latin typeface="Arial" pitchFamily="34" charset="0"/>
                 <a:ea typeface="Arial" pitchFamily="34" charset="-122"/>
@@ -3339,10 +3383,13 @@
               </a:rPr>
               <a:t>Our goal:  </a:t>
             </a:r>
+            <a:pPr indent="0" marL="0">
+              <a:buNone/>
+            </a:pPr>
             <a:r>
               <a:rPr lang="en-US" sz="1150" dirty="0">
                 <a:solidFill>
-                  <a:srgbClr val="0B1F33"/>
+                  <a:srgbClr val="3A1A06"/>
                 </a:solidFill>
                 <a:latin typeface="Arial" pitchFamily="34" charset="0"/>
                 <a:ea typeface="Arial" pitchFamily="34" charset="-122"/>
@@ -3351,6 +3398,59 @@
               <a:t>Build a scalable GenAI ecosystem that drives measurable business value and positions us as an industry leader.</a:t>
             </a:r>
             <a:endParaRPr lang="en-US" sz="1150" dirty="0"/>
+          </a:p>
+        </p:txBody>
+      </p:sp>
+      <p:sp>
+        <p:nvSpPr>
+          <p:cNvPr id="72" name="Text 57"/>
+          <p:cNvSpPr/>
+          <p:nvPr/>
+        </p:nvSpPr>
+        <p:spPr>
+          <a:xfrm>
+            <a:off x="457200" y="6720840"/>
+            <a:ext cx="7315200" cy="182880"/>
+          </a:xfrm>
+          <a:prstGeom prst="rect">
+            <a:avLst/>
+          </a:prstGeom>
+          <a:noFill/>
+          <a:ln/>
+        </p:spPr>
+        <p:txBody>
+          <a:bodyPr wrap="square" lIns="0" tIns="0" rIns="0" bIns="0" rtlCol="0" anchor="ctr"/>
+          <a:lstStyle/>
+          <a:p>
+            <a:pPr indent="0" marL="0">
+              <a:buNone/>
+            </a:pPr>
+            <a:r>
+              <a:rPr lang="en-US" sz="900" b="1" dirty="0">
+                <a:solidFill>
+                  <a:srgbClr val="78564A"/>
+                </a:solidFill>
+                <a:latin typeface="Arial" pitchFamily="34" charset="0"/>
+                <a:ea typeface="Arial" pitchFamily="34" charset="-122"/>
+                <a:cs typeface="Arial" pitchFamily="34" charset="-120"/>
+              </a:rPr>
+              <a:t>Source: </a:t>
+            </a:r>
+            <a:pPr indent="0" marL="0">
+              <a:buNone/>
+            </a:pPr>
+            <a:r>
+              <a:rPr lang="en-US" sz="900" dirty="0">
+                <a:solidFill>
+                  <a:srgbClr val="78564A"/>
+                </a:solidFill>
+                <a:latin typeface="Arial" pitchFamily="34" charset="0"/>
+                <a:ea typeface="Arial" pitchFamily="34" charset="-122"/>
+                <a:cs typeface="Arial" pitchFamily="34" charset="-120"/>
+              </a:rPr>
+              <a:t>Dummy data for illustrative purposes</a:t>
+            </a:r>
+            <a:endParaRPr lang="en-US" sz="900" dirty="0"/>
           </a:p>
         </p:txBody>
       </p:sp>
@@ -3655,325 +3755,4 @@
     </a:ext>
   </a:extLst>
 </a:theme>
-</file>
-
-<file path=ppt/theme/theme2.xml><?xml version="1.0" encoding="utf-8"?>
-<a:theme xmlns:a="http://schemas.openxmlformats.org/drawingml/2006/main" name="Office Theme">
-  <a:themeElements>
-    <a:clrScheme name="Office">
-      <a:dk1>
-        <a:sysClr val="windowText" lastClr="000000"/>
-      </a:dk1>
-      <a:lt1>
-        <a:sysClr val="window" lastClr="FFFFFF"/>
-      </a:lt1>
-      <a:dk2>
-        <a:srgbClr val="0E2841"/>
-      </a:dk2>
-      <a:lt2>
-        <a:srgbClr val="E8E8E8"/>
-      </a:lt2>
-      <a:accent1>
-        <a:srgbClr val="156082"/>
-      </a:accent1>
-      <a:accent2>
-        <a:srgbClr val="E97132"/>
-      </a:accent2>
-      <a:accent3>
-        <a:srgbClr val="196B24"/>
-      </a:accent3>
-      <a:accent4>
-        <a:srgbClr val="0F9ED5"/>
-      </a:accent4>
-      <a:accent5>
-        <a:srgbClr val="A02B93"/>
-      </a:accent5>
-      <a:accent6>
-        <a:srgbClr val="4EA72E"/>
-      </a:accent6>
-      <a:hlink>
-        <a:srgbClr val="467886"/>
-      </a:hlink>
-      <a:folHlink>
-        <a:srgbClr val="96607D"/>
-      </a:folHlink>
-    </a:clrScheme>
-    <a:fontScheme name="Office">
-      <a:majorFont>
-        <a:latin typeface="Aptos Display" panose="02110004020202020204"/>
-        <a:ea typeface=""/>
-        <a:cs typeface=""/>
-        <a:font script="Jpan" typeface="游ゴシック Light"/>
-        <a:font script="Hang" typeface="맑은 고딕"/>
-        <a:font script="Hans" typeface="等线 Light"/>
-        <a:font script="Hant" typeface="新細明體"/>
-        <a:font script="Arab" typeface="Times New Roman"/>
-        <a:font script="Hebr" typeface="Times New Roman"/>
-        <a:font script="Thai" typeface="Angsana New"/>
-        <a:font script="Ethi" typeface="Nyala"/>
-        <a:font script="Beng" typeface="Vrinda"/>
-        <a:font script="Gujr" typeface="Shruti"/>
-        <a:font script="Khmr" typeface="MoolBoran"/>
-        <a:font script="Knda" typeface="Tunga"/>
-        <a:font script="Guru" typeface="Raavi"/>
-        <a:font script="Cans" typeface="Euphemia"/>
-        <a:font script="Cher" typeface="Plantagenet Cherokee"/>
-        <a:font script="Yiii" typeface="Microsoft Yi Baiti"/>
-        <a:font script="Tibt" typeface="Microsoft Himalaya"/>
-        <a:font script="Thaa" typeface="MV Boli"/>
-        <a:font script="Deva" typeface="Mangal"/>
-        <a:font script="Telu" typeface="Gautami"/>
-        <a:font script="Taml" typeface="Latha"/>
-        <a:font script="Syrc" typeface="Estrangelo Edessa"/>
-        <a:font script="Orya" typeface="Kalinga"/>
-        <a:font script="Mlym" typeface="Kartika"/>
-        <a:font script="Laoo" typeface="DokChampa"/>
-        <a:font script="Sinh" typeface="Iskoola Pota"/>
-        <a:font script="Mong" typeface="Mongolian Baiti"/>
-        <a:font script="Viet" typeface="Times New Roman"/>
-        <a:font script="Uigh" typeface="Microsoft Uighur"/>
-        <a:font script="Geor" typeface="Sylfaen"/>
-        <a:font script="Armn" typeface="Arial"/>
-        <a:font script="Bugi" typeface="Leelawadee UI"/>
-        <a:font script="Bopo" typeface="Microsoft JhengHei"/>
-        <a:font script="Java" typeface="Javanese Text"/>
-        <a:font script="Lisu" typeface="Segoe UI"/>
-        <a:font script="Mymr" typeface="Myanmar Text"/>
-        <a:font script="Nkoo" typeface="Ebrima"/>
-        <a:font script="Olck" typeface="Nirmala UI"/>
-        <a:font script="Osma" typeface="Ebrima"/>
-        <a:font script="Phag" typeface="Phagspa"/>
-        <a:font script="Syrn" typeface="Estrangelo Edessa"/>
-        <a:font script="Syrj" typeface="Estrangelo Edessa"/>
-        <a:font script="Syre" typeface="Estrangelo Edessa"/>
-        <a:font script="Sora" typeface="Nirmala UI"/>
-        <a:font script="Tale" typeface="Microsoft Tai Le"/>
-        <a:font script="Talu" typeface="Microsoft New Tai Lue"/>
-        <a:font script="Tfng" typeface="Ebrima"/>
-      </a:majorFont>
-      <a:minorFont>
-        <a:latin typeface="Aptos" panose="02110004020202020204"/>
-        <a:ea typeface=""/>
-        <a:cs typeface=""/>
-        <a:font script="Jpan" typeface="游ゴシック"/>
-        <a:font script="Hang" typeface="맑은 고딕"/>
-        <a:font script="Hans" typeface="等线"/>
-        <a:font script="Hant" typeface="新細明體"/>
-        <a:font script="Arab" typeface="Arial"/>
-        <a:font script="Hebr" typeface="Arial"/>
-        <a:font script="Thai" typeface="Cordia New"/>
-        <a:font script="Ethi" typeface="Nyala"/>
-        <a:font script="Beng" typeface="Vrinda"/>
-        <a:font script="Gujr" typeface="Shruti"/>
-        <a:font script="Khmr" typeface="DaunPenh"/>
-        <a:font script="Knda" typeface="Tunga"/>
-        <a:font script="Guru" typeface="Raavi"/>
-        <a:font script="Cans" typeface="Euphemia"/>
-        <a:font script="Cher" typeface="Plantagenet Cherokee"/>
-        <a:font script="Yiii" typeface="Microsoft Yi Baiti"/>
-        <a:font script="Tibt" typeface="Microsoft Himalaya"/>
-        <a:font script="Thaa" typeface="MV Boli"/>
-        <a:font script="Deva" typeface="Mangal"/>
-        <a:font script="Telu" typeface="Gautami"/>
-        <a:font script="Taml" typeface="Latha"/>
-        <a:font script="Syrc" typeface="Estrangelo Edessa"/>
-        <a:font script="Orya" typeface="Kalinga"/>
-        <a:font script="Mlym" typeface="Kartika"/>
-        <a:font script="Laoo" typeface="DokChampa"/>
-        <a:font script="Sinh" typeface="Iskoola Pota"/>
-        <a:font script="Mong" typeface="Mongolian Baiti"/>
-        <a:font script="Viet" typeface="Arial"/>
-        <a:font script="Uigh" typeface="Microsoft Uighur"/>
-        <a:font script="Geor" typeface="Sylfaen"/>
-        <a:font script="Armn" typeface="Arial"/>
-        <a:font script="Bugi" typeface="Leelawadee UI"/>
-        <a:font script="Bopo" typeface="Microsoft JhengHei"/>
-        <a:font script="Java" typeface="Javanese Text"/>
-        <a:font script="Lisu" typeface="Segoe UI"/>
-        <a:font script="Mymr" typeface="Myanmar Text"/>
-        <a:font script="Nkoo" typeface="Ebrima"/>
-        <a:font script="Olck" typeface="Nirmala UI"/>
-        <a:font script="Osma" typeface="Ebrima"/>
-        <a:font script="Phag" typeface="Phagspa"/>
-        <a:font script="Syrn" typeface="Estrangelo Edessa"/>
-        <a:font script="Syrj" typeface="Estrangelo Edessa"/>
-        <a:font script="Syre" typeface="Estrangelo Edessa"/>
-        <a:font script="Sora" typeface="Nirmala UI"/>
-        <a:font script="Tale" typeface="Microsoft Tai Le"/>
-        <a:font script="Talu" typeface="Microsoft New Tai Lue"/>
-        <a:font script="Tfng" typeface="Ebrima"/>
-      </a:minorFont>
-    </a:fontScheme>
-    <a:fmtScheme name="Office">
-      <a:fillStyleLst>
-        <a:solidFill>
-          <a:schemeClr val="phClr"/>
-        </a:solidFill>
-        <a:gradFill rotWithShape="1">
-          <a:gsLst>
-            <a:gs pos="0">
-              <a:schemeClr val="phClr">
-                <a:lumMod val="110000"/>
-                <a:satMod val="105000"/>
-                <a:tint val="67000"/>
-              </a:schemeClr>
-            </a:gs>
-            <a:gs pos="50000">
-              <a:schemeClr val="phClr">
-                <a:lumMod val="105000"/>
-                <a:satMod val="103000"/>
-                <a:tint val="73000"/>
-              </a:schemeClr>
-            </a:gs>
-            <a:gs pos="100000">
-              <a:schemeClr val="phClr">
-                <a:lumMod val="105000"/>
-                <a:satMod val="109000"/>
-                <a:tint val="81000"/>
-              </a:schemeClr>
-            </a:gs>
-          </a:gsLst>
-          <a:lin ang="5400000" scaled="0"/>
-        </a:gradFill>
-        <a:gradFill rotWithShape="1">
-          <a:gsLst>
-            <a:gs pos="0">
-              <a:schemeClr val="phClr">
-                <a:satMod val="103000"/>
-                <a:lumMod val="102000"/>
-                <a:tint val="94000"/>
-              </a:schemeClr>
-            </a:gs>
-            <a:gs pos="50000">
-              <a:schemeClr val="phClr">
-                <a:satMod val="110000"/>
-                <a:lumMod val="100000"/>
-                <a:shade val="100000"/>
-              </a:schemeClr>
-            </a:gs>
-            <a:gs pos="100000">
-              <a:schemeClr val="phClr">
-                <a:lumMod val="99000"/>
-                <a:satMod val="120000"/>
-                <a:shade val="78000"/>
-              </a:schemeClr>
-            </a:gs>
-          </a:gsLst>
-          <a:lin ang="5400000" scaled="0"/>
-        </a:gradFill>
-      </a:fillStyleLst>
-      <a:lnStyleLst>
-        <a:ln w="12700" cap="flat" cmpd="sng" algn="ctr">
-          <a:solidFill>
-            <a:schemeClr val="phClr"/>
-          </a:solidFill>
-          <a:prstDash val="solid"/>
-          <a:miter lim="800000"/>
-        </a:ln>
-        <a:ln w="19050" cap="flat" cmpd="sng" algn="ctr">
-          <a:solidFill>
-            <a:schemeClr val="phClr"/>
-          </a:solidFill>
-          <a:prstDash val="solid"/>
-          <a:miter lim="800000"/>
-        </a:ln>
-        <a:ln w="25400" cap="flat" cmpd="sng" algn="ctr">
-          <a:solidFill>
-            <a:schemeClr val="phClr"/>
-          </a:solidFill>
-          <a:prstDash val="solid"/>
-          <a:miter lim="800000"/>
-        </a:ln>
-      </a:lnStyleLst>
-      <a:effectStyleLst>
-        <a:effectStyle>
-          <a:effectLst/>
-        </a:effectStyle>
-        <a:effectStyle>
-          <a:effectLst/>
-        </a:effectStyle>
-        <a:effectStyle>
-          <a:effectLst>
-            <a:outerShdw blurRad="57150" dist="19050" dir="5400000" algn="ctr" rotWithShape="0">
-              <a:srgbClr val="000000">
-                <a:alpha val="63000"/>
-              </a:srgbClr>
-            </a:outerShdw>
-          </a:effectLst>
-        </a:effectStyle>
-      </a:effectStyleLst>
-      <a:bgFillStyleLst>
-        <a:solidFill>
-          <a:schemeClr val="phClr"/>
-        </a:solidFill>
-        <a:solidFill>
-          <a:schemeClr val="phClr">
-            <a:tint val="95000"/>
-            <a:satMod val="170000"/>
-          </a:schemeClr>
-        </a:solidFill>
-        <a:gradFill rotWithShape="1">
-          <a:gsLst>
-            <a:gs pos="0">
-              <a:schemeClr val="phClr">
-                <a:tint val="93000"/>
-                <a:satMod val="150000"/>
-                <a:shade val="98000"/>
-                <a:lumMod val="102000"/>
-              </a:schemeClr>
-            </a:gs>
-            <a:gs pos="50000">
-              <a:schemeClr val="phClr">
-                <a:tint val="98000"/>
-                <a:satMod val="130000"/>
-                <a:shade val="90000"/>
-                <a:lumMod val="103000"/>
-              </a:schemeClr>
-            </a:gs>
-            <a:gs pos="100000">
-              <a:schemeClr val="phClr">
-                <a:shade val="63000"/>
-                <a:satMod val="120000"/>
-              </a:schemeClr>
-            </a:gs>
-          </a:gsLst>
-          <a:lin ang="5400000" scaled="0"/>
-        </a:gradFill>
-      </a:bgFillStyleLst>
-    </a:fmtScheme>
-  </a:themeElements>
-  <a:objectDefaults>
-    <a:lnDef>
-      <a:spPr/>
-      <a:bodyPr/>
-      <a:lstStyle/>
-      <a:style>
-        <a:lnRef idx="2">
-          <a:schemeClr val="accent1"/>
-        </a:lnRef>
-        <a:fillRef idx="0">
-          <a:schemeClr val="accent1"/>
-        </a:fillRef>
-        <a:effectRef idx="1">
-          <a:schemeClr val="accent1"/>
-        </a:effectRef>
-        <a:fontRef idx="minor">
-          <a:schemeClr val="tx1"/>
-        </a:fontRef>
-      </a:style>
-    </a:lnDef>
-  </a:objectDefaults>
-  <a:extraClrSchemeLst/>
-  <a:extLst>
-    <a:ext uri="{05A4C25C-085E-4340-85A3-A5531E510DB2}">
-      <thm15:themeFamily xmlns:thm15="http://schemas.microsoft.com/office/thememl/2012/main" name="Office Theme" id="{2E142A2C-CD16-42D6-873A-C26D2A0506FA}" vid="{1BDDFF52-6CD6-40A5-AB3C-68EB2F1E4D0A}"/>
-    </a:ext>
-  </a:extLst>
-</a:theme>
-</file>
-
-<file path=docMetadata/LabelInfo.xml><?xml version="1.0" encoding="utf-8"?>
-<clbl:labelList xmlns:clbl="http://schemas.microsoft.com/office/2020/mipLabelMetadata">
-  <clbl:label id="{87ba5c36-b7cf-4793-bbc2-bd5b3a9f95ca}" enabled="1" method="Privileged" siteId="{72f988bf-86f1-41af-91ab-2d7cd011db47}" contentBits="0" removed="0"/>
-</clbl:labelList>
 </file>